--- a/e2e/pptx/fixtures/chart-gallery.pptx
+++ b/e2e/pptx/fixtures/chart-gallery.pptx
@@ -489,6 +489,7 @@
     <cx:title>
       <cx:tx>
         <cx:rich>
+          <a:bodyPr/>
           <a:p>
             <a:r>
               <a:t>Funnel</a:t>
@@ -568,6 +569,7 @@
     <cx:title>
       <cx:tx>
         <cx:rich>
+          <a:bodyPr/>
           <a:p>
             <a:r>
               <a:t>Sunburst</a:t>
@@ -641,6 +643,7 @@
     <cx:title>
       <cx:tx>
         <cx:rich>
+          <a:bodyPr/>
           <a:p>
             <a:r>
               <a:t>Histogram</a:t>
@@ -651,7 +654,7 @@
     </cx:title>
     <cx:plotArea>
       <cx:plotAreaRegion>
-        <cx:series layoutId="histogram" uniqueId="{00000000-0000-0000-0000-000000000000}">
+        <cx:series layoutId="clusteredColumn" uniqueId="{00000000-0000-0000-0000-000000000000}">
           <cx:tx>
             <cx:txData>
               <cx:f>Sheet1!$B$1</cx:f>
@@ -664,6 +667,11 @@
             </a:solidFill>
           </cx:spPr>
           <cx:dataId val="0"/>
+          <cx:layoutPr>
+            <cx:binning intervalClosed="r">
+              <cx:binCount val="4"/>
+            </cx:binning>
+          </cx:layoutPr>
         </cx:series>
       </cx:plotAreaRegion>
     </cx:plotArea>
@@ -740,6 +748,7 @@
     <cx:title>
       <cx:tx>
         <cx:rich>
+          <a:bodyPr/>
           <a:p>
             <a:r>
               <a:t>Box-Whisker</a:t>
@@ -1619,6 +1628,7 @@
     <cx:title>
       <cx:tx>
         <cx:rich>
+          <a:bodyPr/>
           <a:p>
             <a:r>
               <a:t>Waterfall</a:t>
@@ -1678,6 +1688,7 @@
     <cx:title>
       <cx:tx>
         <cx:rich>
+          <a:bodyPr/>
           <a:p>
             <a:r>
               <a:t>Treemap</a:t>
@@ -1925,6 +1936,7 @@
     <cx:title>
       <cx:tx>
         <cx:rich>
+          <a:bodyPr/>
           <a:p>
             <a:r>
               <a:t>Region Map</a:t>
@@ -3200,6 +3212,3842 @@
     <c:plotVisOnly val="1"/>
   </c:chart>
 </c:chartSpace>
+</file>
+
+<file path=ppt/charts/colors11.xml><?xml version="1.0" encoding="utf-8"?>
+<cs:colorStyle xmlns:cs="http://schemas.microsoft.com/office/drawing/2012/chartStyle" xmlns:a="http://schemas.openxmlformats.org/drawingml/2006/main" meth="cycle" id="10">
+  <a:schemeClr val="accent1"/>
+  <a:schemeClr val="accent2"/>
+  <a:schemeClr val="accent3"/>
+  <a:schemeClr val="accent4"/>
+  <a:schemeClr val="accent5"/>
+  <a:schemeClr val="accent6"/>
+  <cs:variation/>
+  <cs:variation>
+    <a:lumMod val="60000"/>
+  </cs:variation>
+  <cs:variation>
+    <a:lumMod val="80000"/>
+    <a:lumOff val="20000"/>
+  </cs:variation>
+  <cs:variation>
+    <a:lumMod val="80000"/>
+  </cs:variation>
+  <cs:variation>
+    <a:lumMod val="60000"/>
+    <a:lumOff val="40000"/>
+  </cs:variation>
+  <cs:variation>
+    <a:lumMod val="50000"/>
+  </cs:variation>
+  <cs:variation>
+    <a:lumMod val="70000"/>
+    <a:lumOff val="30000"/>
+  </cs:variation>
+  <cs:variation>
+    <a:lumMod val="70000"/>
+  </cs:variation>
+  <cs:variation>
+    <a:lumMod val="50000"/>
+    <a:lumOff val="50000"/>
+  </cs:variation>
+</cs:colorStyle>
+</file>
+
+<file path=ppt/charts/colors12.xml><?xml version="1.0" encoding="utf-8"?>
+<cs:colorStyle xmlns:cs="http://schemas.microsoft.com/office/drawing/2012/chartStyle" xmlns:a="http://schemas.openxmlformats.org/drawingml/2006/main" meth="cycle" id="10">
+  <a:schemeClr val="accent1"/>
+  <a:schemeClr val="accent2"/>
+  <a:schemeClr val="accent3"/>
+  <a:schemeClr val="accent4"/>
+  <a:schemeClr val="accent5"/>
+  <a:schemeClr val="accent6"/>
+  <cs:variation/>
+  <cs:variation>
+    <a:lumMod val="60000"/>
+  </cs:variation>
+  <cs:variation>
+    <a:lumMod val="80000"/>
+    <a:lumOff val="20000"/>
+  </cs:variation>
+  <cs:variation>
+    <a:lumMod val="80000"/>
+  </cs:variation>
+  <cs:variation>
+    <a:lumMod val="60000"/>
+    <a:lumOff val="40000"/>
+  </cs:variation>
+  <cs:variation>
+    <a:lumMod val="50000"/>
+  </cs:variation>
+  <cs:variation>
+    <a:lumMod val="70000"/>
+    <a:lumOff val="30000"/>
+  </cs:variation>
+  <cs:variation>
+    <a:lumMod val="70000"/>
+  </cs:variation>
+  <cs:variation>
+    <a:lumMod val="50000"/>
+    <a:lumOff val="50000"/>
+  </cs:variation>
+</cs:colorStyle>
+</file>
+
+<file path=ppt/charts/colors13.xml><?xml version="1.0" encoding="utf-8"?>
+<cs:colorStyle xmlns:cs="http://schemas.microsoft.com/office/drawing/2012/chartStyle" xmlns:a="http://schemas.openxmlformats.org/drawingml/2006/main" meth="cycle" id="10">
+  <a:schemeClr val="accent1"/>
+  <a:schemeClr val="accent2"/>
+  <a:schemeClr val="accent3"/>
+  <a:schemeClr val="accent4"/>
+  <a:schemeClr val="accent5"/>
+  <a:schemeClr val="accent6"/>
+  <cs:variation/>
+  <cs:variation>
+    <a:lumMod val="60000"/>
+  </cs:variation>
+  <cs:variation>
+    <a:lumMod val="80000"/>
+    <a:lumOff val="20000"/>
+  </cs:variation>
+  <cs:variation>
+    <a:lumMod val="80000"/>
+  </cs:variation>
+  <cs:variation>
+    <a:lumMod val="60000"/>
+    <a:lumOff val="40000"/>
+  </cs:variation>
+  <cs:variation>
+    <a:lumMod val="50000"/>
+  </cs:variation>
+  <cs:variation>
+    <a:lumMod val="70000"/>
+    <a:lumOff val="30000"/>
+  </cs:variation>
+  <cs:variation>
+    <a:lumMod val="70000"/>
+  </cs:variation>
+  <cs:variation>
+    <a:lumMod val="50000"/>
+    <a:lumOff val="50000"/>
+  </cs:variation>
+</cs:colorStyle>
+</file>
+
+<file path=ppt/charts/colors14.xml><?xml version="1.0" encoding="utf-8"?>
+<cs:colorStyle xmlns:cs="http://schemas.microsoft.com/office/drawing/2012/chartStyle" xmlns:a="http://schemas.openxmlformats.org/drawingml/2006/main" meth="cycle" id="10">
+  <a:schemeClr val="accent1"/>
+  <a:schemeClr val="accent2"/>
+  <a:schemeClr val="accent3"/>
+  <a:schemeClr val="accent4"/>
+  <a:schemeClr val="accent5"/>
+  <a:schemeClr val="accent6"/>
+  <cs:variation/>
+  <cs:variation>
+    <a:lumMod val="60000"/>
+  </cs:variation>
+  <cs:variation>
+    <a:lumMod val="80000"/>
+    <a:lumOff val="20000"/>
+  </cs:variation>
+  <cs:variation>
+    <a:lumMod val="80000"/>
+  </cs:variation>
+  <cs:variation>
+    <a:lumMod val="60000"/>
+    <a:lumOff val="40000"/>
+  </cs:variation>
+  <cs:variation>
+    <a:lumMod val="50000"/>
+  </cs:variation>
+  <cs:variation>
+    <a:lumMod val="70000"/>
+    <a:lumOff val="30000"/>
+  </cs:variation>
+  <cs:variation>
+    <a:lumMod val="70000"/>
+  </cs:variation>
+  <cs:variation>
+    <a:lumMod val="50000"/>
+    <a:lumOff val="50000"/>
+  </cs:variation>
+</cs:colorStyle>
+</file>
+
+<file path=ppt/charts/colors18.xml><?xml version="1.0" encoding="utf-8"?>
+<cs:colorStyle xmlns:cs="http://schemas.microsoft.com/office/drawing/2012/chartStyle" xmlns:a="http://schemas.openxmlformats.org/drawingml/2006/main" meth="cycle" id="10">
+  <a:schemeClr val="accent1"/>
+  <a:schemeClr val="accent2"/>
+  <a:schemeClr val="accent3"/>
+  <a:schemeClr val="accent4"/>
+  <a:schemeClr val="accent5"/>
+  <a:schemeClr val="accent6"/>
+  <cs:variation/>
+  <cs:variation>
+    <a:lumMod val="60000"/>
+  </cs:variation>
+  <cs:variation>
+    <a:lumMod val="80000"/>
+    <a:lumOff val="20000"/>
+  </cs:variation>
+  <cs:variation>
+    <a:lumMod val="80000"/>
+  </cs:variation>
+  <cs:variation>
+    <a:lumMod val="60000"/>
+    <a:lumOff val="40000"/>
+  </cs:variation>
+  <cs:variation>
+    <a:lumMod val="50000"/>
+  </cs:variation>
+  <cs:variation>
+    <a:lumMod val="70000"/>
+    <a:lumOff val="30000"/>
+  </cs:variation>
+  <cs:variation>
+    <a:lumMod val="70000"/>
+  </cs:variation>
+  <cs:variation>
+    <a:lumMod val="50000"/>
+    <a:lumOff val="50000"/>
+  </cs:variation>
+</cs:colorStyle>
+</file>
+
+<file path=ppt/charts/colors19.xml><?xml version="1.0" encoding="utf-8"?>
+<cs:colorStyle xmlns:cs="http://schemas.microsoft.com/office/drawing/2012/chartStyle" xmlns:a="http://schemas.openxmlformats.org/drawingml/2006/main" meth="cycle" id="10">
+  <a:schemeClr val="accent1"/>
+  <a:schemeClr val="accent2"/>
+  <a:schemeClr val="accent3"/>
+  <a:schemeClr val="accent4"/>
+  <a:schemeClr val="accent5"/>
+  <a:schemeClr val="accent6"/>
+  <cs:variation/>
+  <cs:variation>
+    <a:lumMod val="60000"/>
+  </cs:variation>
+  <cs:variation>
+    <a:lumMod val="80000"/>
+    <a:lumOff val="20000"/>
+  </cs:variation>
+  <cs:variation>
+    <a:lumMod val="80000"/>
+  </cs:variation>
+  <cs:variation>
+    <a:lumMod val="60000"/>
+    <a:lumOff val="40000"/>
+  </cs:variation>
+  <cs:variation>
+    <a:lumMod val="50000"/>
+  </cs:variation>
+  <cs:variation>
+    <a:lumMod val="70000"/>
+    <a:lumOff val="30000"/>
+  </cs:variation>
+  <cs:variation>
+    <a:lumMod val="70000"/>
+  </cs:variation>
+  <cs:variation>
+    <a:lumMod val="50000"/>
+    <a:lumOff val="50000"/>
+  </cs:variation>
+</cs:colorStyle>
+</file>
+
+<file path=ppt/charts/colors20.xml><?xml version="1.0" encoding="utf-8"?>
+<cs:colorStyle xmlns:cs="http://schemas.microsoft.com/office/drawing/2012/chartStyle" xmlns:a="http://schemas.openxmlformats.org/drawingml/2006/main" meth="cycle" id="10">
+  <a:schemeClr val="accent1"/>
+  <a:schemeClr val="accent2"/>
+  <a:schemeClr val="accent3"/>
+  <a:schemeClr val="accent4"/>
+  <a:schemeClr val="accent5"/>
+  <a:schemeClr val="accent6"/>
+  <cs:variation/>
+  <cs:variation>
+    <a:lumMod val="60000"/>
+  </cs:variation>
+  <cs:variation>
+    <a:lumMod val="80000"/>
+    <a:lumOff val="20000"/>
+  </cs:variation>
+  <cs:variation>
+    <a:lumMod val="80000"/>
+  </cs:variation>
+  <cs:variation>
+    <a:lumMod val="60000"/>
+    <a:lumOff val="40000"/>
+  </cs:variation>
+  <cs:variation>
+    <a:lumMod val="50000"/>
+  </cs:variation>
+  <cs:variation>
+    <a:lumMod val="70000"/>
+    <a:lumOff val="30000"/>
+  </cs:variation>
+  <cs:variation>
+    <a:lumMod val="70000"/>
+  </cs:variation>
+  <cs:variation>
+    <a:lumMod val="50000"/>
+    <a:lumOff val="50000"/>
+  </cs:variation>
+</cs:colorStyle>
+</file>
+
+<file path=ppt/charts/style11.xml><?xml version="1.0" encoding="utf-8"?>
+<cs:chartStyle xmlns:cs="http://schemas.microsoft.com/office/drawing/2012/chartStyle" xmlns:a="http://schemas.openxmlformats.org/drawingml/2006/main" id="419">
+  <cs:axisTitle>
+    <cs:lnRef idx="0"/>
+    <cs:fillRef idx="0"/>
+    <cs:effectRef idx="0"/>
+    <cs:fontRef idx="minor">
+      <a:schemeClr val="tx1">
+        <a:lumMod val="65000"/>
+        <a:lumOff val="35000"/>
+      </a:schemeClr>
+    </cs:fontRef>
+    <cs:defRPr sz="1197"/>
+  </cs:axisTitle>
+  <cs:categoryAxis>
+    <cs:lnRef idx="0"/>
+    <cs:fillRef idx="0"/>
+    <cs:effectRef idx="0"/>
+    <cs:fontRef idx="minor">
+      <a:schemeClr val="tx1">
+        <a:lumMod val="65000"/>
+        <a:lumOff val="35000"/>
+      </a:schemeClr>
+    </cs:fontRef>
+    <cs:spPr>
+      <a:ln w="9525" cap="flat" cmpd="sng" algn="ctr">
+        <a:solidFill>
+          <a:schemeClr val="tx1">
+            <a:lumMod val="15000"/>
+            <a:lumOff val="85000"/>
+          </a:schemeClr>
+        </a:solidFill>
+        <a:round/>
+      </a:ln>
+    </cs:spPr>
+    <cs:defRPr sz="1197"/>
+  </cs:categoryAxis>
+  <cs:chartArea mods="allowNoFillOverride allowNoLineOverride">
+    <cs:lnRef idx="0"/>
+    <cs:fillRef idx="0"/>
+    <cs:effectRef idx="0"/>
+    <cs:fontRef idx="minor">
+      <a:schemeClr val="tx1"/>
+    </cs:fontRef>
+    <cs:spPr>
+      <a:solidFill>
+        <a:schemeClr val="bg1"/>
+      </a:solidFill>
+      <a:ln w="9525" cap="flat" cmpd="sng" algn="ctr">
+        <a:solidFill>
+          <a:schemeClr val="tx1">
+            <a:lumMod val="15000"/>
+            <a:lumOff val="85000"/>
+          </a:schemeClr>
+        </a:solidFill>
+        <a:round/>
+      </a:ln>
+    </cs:spPr>
+    <cs:defRPr sz="1330"/>
+  </cs:chartArea>
+  <cs:dataLabel>
+    <cs:lnRef idx="0"/>
+    <cs:fillRef idx="0"/>
+    <cs:effectRef idx="0"/>
+    <cs:fontRef idx="minor">
+      <a:schemeClr val="tx1">
+        <a:lumMod val="65000"/>
+        <a:lumOff val="35000"/>
+      </a:schemeClr>
+    </cs:fontRef>
+    <cs:defRPr sz="1197"/>
+  </cs:dataLabel>
+  <cs:dataLabelCallout>
+    <cs:lnRef idx="0"/>
+    <cs:fillRef idx="0"/>
+    <cs:effectRef idx="0"/>
+    <cs:fontRef idx="minor">
+      <a:schemeClr val="dk1">
+        <a:lumMod val="65000"/>
+        <a:lumOff val="35000"/>
+      </a:schemeClr>
+    </cs:fontRef>
+    <cs:spPr>
+      <a:solidFill>
+        <a:schemeClr val="lt1"/>
+      </a:solidFill>
+      <a:ln>
+        <a:solidFill>
+          <a:schemeClr val="dk1">
+            <a:lumMod val="25000"/>
+            <a:lumOff val="75000"/>
+          </a:schemeClr>
+        </a:solidFill>
+      </a:ln>
+    </cs:spPr>
+    <cs:defRPr sz="1197"/>
+    <cs:bodyPr rot="0" spcFirstLastPara="1" vertOverflow="clip" horzOverflow="clip" vert="horz" wrap="square" lIns="36576" tIns="18288" rIns="36576" bIns="18288" anchor="ctr" anchorCtr="1">
+      <a:spAutoFit/>
+    </cs:bodyPr>
+  </cs:dataLabelCallout>
+  <cs:dataPoint>
+    <cs:lnRef idx="0"/>
+    <cs:fillRef idx="0">
+      <cs:styleClr val="auto"/>
+    </cs:fillRef>
+    <cs:effectRef idx="0"/>
+    <cs:fontRef idx="minor">
+      <a:schemeClr val="tx1"/>
+    </cs:fontRef>
+    <cs:spPr>
+      <a:solidFill>
+        <a:schemeClr val="phClr"/>
+      </a:solidFill>
+    </cs:spPr>
+  </cs:dataPoint>
+  <cs:dataPoint3D>
+    <cs:lnRef idx="0"/>
+    <cs:fillRef idx="0">
+      <cs:styleClr val="auto"/>
+    </cs:fillRef>
+    <cs:effectRef idx="0"/>
+    <cs:fontRef idx="minor">
+      <a:schemeClr val="tx1"/>
+    </cs:fontRef>
+    <cs:spPr>
+      <a:solidFill>
+        <a:schemeClr val="phClr"/>
+      </a:solidFill>
+    </cs:spPr>
+  </cs:dataPoint3D>
+  <cs:dataPointLine>
+    <cs:lnRef idx="0">
+      <cs:styleClr val="auto"/>
+    </cs:lnRef>
+    <cs:fillRef idx="0"/>
+    <cs:effectRef idx="0"/>
+    <cs:fontRef idx="minor">
+      <a:schemeClr val="tx1"/>
+    </cs:fontRef>
+    <cs:spPr>
+      <a:ln w="28575" cap="rnd">
+        <a:solidFill>
+          <a:schemeClr val="phClr"/>
+        </a:solidFill>
+        <a:round/>
+      </a:ln>
+    </cs:spPr>
+  </cs:dataPointLine>
+  <cs:dataPointMarker>
+    <cs:lnRef idx="0"/>
+    <cs:fillRef idx="0">
+      <cs:styleClr val="auto"/>
+    </cs:fillRef>
+    <cs:effectRef idx="0"/>
+    <cs:fontRef idx="minor">
+      <a:schemeClr val="tx1"/>
+    </cs:fontRef>
+    <cs:spPr>
+      <a:solidFill>
+        <a:schemeClr val="phClr"/>
+      </a:solidFill>
+      <a:ln w="9525">
+        <a:solidFill>
+          <a:schemeClr val="lt1"/>
+        </a:solidFill>
+      </a:ln>
+    </cs:spPr>
+  </cs:dataPointMarker>
+  <cs:dataPointMarkerLayout symbol="circle" size="5"/>
+  <cs:dataPointWireframe>
+    <cs:lnRef idx="0">
+      <cs:styleClr val="auto"/>
+    </cs:lnRef>
+    <cs:fillRef idx="0"/>
+    <cs:effectRef idx="0"/>
+    <cs:fontRef idx="minor">
+      <a:schemeClr val="tx1"/>
+    </cs:fontRef>
+    <cs:spPr>
+      <a:ln w="28575" cap="rnd">
+        <a:solidFill>
+          <a:schemeClr val="phClr"/>
+        </a:solidFill>
+        <a:round/>
+      </a:ln>
+    </cs:spPr>
+  </cs:dataPointWireframe>
+  <cs:dataTable>
+    <cs:lnRef idx="0"/>
+    <cs:fillRef idx="0"/>
+    <cs:effectRef idx="0"/>
+    <cs:fontRef idx="minor">
+      <a:schemeClr val="tx1">
+        <a:lumMod val="65000"/>
+        <a:lumOff val="35000"/>
+      </a:schemeClr>
+    </cs:fontRef>
+    <cs:spPr>
+      <a:ln w="9525">
+        <a:solidFill>
+          <a:schemeClr val="tx1">
+            <a:lumMod val="15000"/>
+            <a:lumOff val="85000"/>
+          </a:schemeClr>
+        </a:solidFill>
+      </a:ln>
+    </cs:spPr>
+    <cs:defRPr sz="1197"/>
+  </cs:dataTable>
+  <cs:downBar>
+    <cs:lnRef idx="0"/>
+    <cs:fillRef idx="0"/>
+    <cs:effectRef idx="0"/>
+    <cs:fontRef idx="minor">
+      <a:schemeClr val="dk1"/>
+    </cs:fontRef>
+    <cs:spPr>
+      <a:solidFill>
+        <a:schemeClr val="dk1">
+          <a:lumMod val="65000"/>
+          <a:lumOff val="35000"/>
+        </a:schemeClr>
+      </a:solidFill>
+      <a:ln w="9525">
+        <a:solidFill>
+          <a:schemeClr val="tx1">
+            <a:lumMod val="65000"/>
+            <a:lumOff val="35000"/>
+          </a:schemeClr>
+        </a:solidFill>
+      </a:ln>
+    </cs:spPr>
+  </cs:downBar>
+  <cs:dropLine>
+    <cs:lnRef idx="0"/>
+    <cs:fillRef idx="0"/>
+    <cs:effectRef idx="0"/>
+    <cs:fontRef idx="minor">
+      <a:schemeClr val="tx1"/>
+    </cs:fontRef>
+    <cs:spPr>
+      <a:ln w="9525" cap="flat" cmpd="sng" algn="ctr">
+        <a:solidFill>
+          <a:schemeClr val="tx1">
+            <a:lumMod val="35000"/>
+            <a:lumOff val="65000"/>
+          </a:schemeClr>
+        </a:solidFill>
+        <a:round/>
+      </a:ln>
+    </cs:spPr>
+  </cs:dropLine>
+  <cs:errorBar>
+    <cs:lnRef idx="0"/>
+    <cs:fillRef idx="0"/>
+    <cs:effectRef idx="0"/>
+    <cs:fontRef idx="minor">
+      <a:schemeClr val="tx1"/>
+    </cs:fontRef>
+    <cs:spPr>
+      <a:ln w="9525" cap="flat" cmpd="sng" algn="ctr">
+        <a:solidFill>
+          <a:schemeClr val="tx1">
+            <a:lumMod val="65000"/>
+            <a:lumOff val="35000"/>
+          </a:schemeClr>
+        </a:solidFill>
+        <a:round/>
+      </a:ln>
+    </cs:spPr>
+  </cs:errorBar>
+  <cs:floor>
+    <cs:lnRef idx="0"/>
+    <cs:fillRef idx="0"/>
+    <cs:effectRef idx="0"/>
+    <cs:fontRef idx="minor">
+      <a:schemeClr val="tx1"/>
+    </cs:fontRef>
+  </cs:floor>
+  <cs:gridlineMajor>
+    <cs:lnRef idx="0"/>
+    <cs:fillRef idx="0"/>
+    <cs:effectRef idx="0"/>
+    <cs:fontRef idx="minor">
+      <a:schemeClr val="tx1"/>
+    </cs:fontRef>
+    <cs:spPr>
+      <a:ln w="9525" cap="flat" cmpd="sng" algn="ctr">
+        <a:solidFill>
+          <a:schemeClr val="tx1">
+            <a:lumMod val="15000"/>
+            <a:lumOff val="85000"/>
+          </a:schemeClr>
+        </a:solidFill>
+        <a:round/>
+      </a:ln>
+    </cs:spPr>
+  </cs:gridlineMajor>
+  <cs:gridlineMinor>
+    <cs:lnRef idx="0"/>
+    <cs:fillRef idx="0"/>
+    <cs:effectRef idx="0"/>
+    <cs:fontRef idx="minor">
+      <a:schemeClr val="tx1"/>
+    </cs:fontRef>
+    <cs:spPr>
+      <a:ln w="9525" cap="flat" cmpd="sng" algn="ctr">
+        <a:solidFill>
+          <a:schemeClr val="tx1">
+            <a:lumMod val="15000"/>
+            <a:lumOff val="85000"/>
+          </a:schemeClr>
+        </a:solidFill>
+        <a:round/>
+      </a:ln>
+    </cs:spPr>
+  </cs:gridlineMinor>
+  <cs:hiLoLine>
+    <cs:lnRef idx="0"/>
+    <cs:fillRef idx="0"/>
+    <cs:effectRef idx="0"/>
+    <cs:fontRef idx="minor">
+      <a:schemeClr val="tx1"/>
+    </cs:fontRef>
+    <cs:spPr>
+      <a:ln w="9525" cap="flat" cmpd="sng" algn="ctr">
+        <a:solidFill>
+          <a:schemeClr val="tx1">
+            <a:lumMod val="75000"/>
+            <a:lumOff val="25000"/>
+          </a:schemeClr>
+        </a:solidFill>
+        <a:round/>
+      </a:ln>
+    </cs:spPr>
+  </cs:hiLoLine>
+  <cs:leaderLine>
+    <cs:lnRef idx="0"/>
+    <cs:fillRef idx="0"/>
+    <cs:effectRef idx="0"/>
+    <cs:fontRef idx="minor">
+      <a:schemeClr val="tx1"/>
+    </cs:fontRef>
+    <cs:spPr>
+      <a:ln w="9525" cap="flat" cmpd="sng" algn="ctr">
+        <a:solidFill>
+          <a:schemeClr val="tx1">
+            <a:lumMod val="35000"/>
+            <a:lumOff val="65000"/>
+          </a:schemeClr>
+        </a:solidFill>
+        <a:round/>
+      </a:ln>
+    </cs:spPr>
+  </cs:leaderLine>
+  <cs:legend>
+    <cs:lnRef idx="0"/>
+    <cs:fillRef idx="0"/>
+    <cs:effectRef idx="0"/>
+    <cs:fontRef idx="minor">
+      <a:schemeClr val="tx1">
+        <a:lumMod val="65000"/>
+        <a:lumOff val="35000"/>
+      </a:schemeClr>
+    </cs:fontRef>
+    <cs:defRPr sz="1197"/>
+  </cs:legend>
+  <cs:plotArea mods="allowNoFillOverride allowNoLineOverride">
+    <cs:lnRef idx="0"/>
+    <cs:fillRef idx="0"/>
+    <cs:effectRef idx="0"/>
+    <cs:fontRef idx="minor">
+      <a:schemeClr val="tx1"/>
+    </cs:fontRef>
+  </cs:plotArea>
+  <cs:plotArea3D mods="allowNoFillOverride allowNoLineOverride">
+    <cs:lnRef idx="0"/>
+    <cs:fillRef idx="0"/>
+    <cs:effectRef idx="0"/>
+    <cs:fontRef idx="minor">
+      <a:schemeClr val="tx1"/>
+    </cs:fontRef>
+  </cs:plotArea3D>
+  <cs:seriesAxis>
+    <cs:lnRef idx="0"/>
+    <cs:fillRef idx="0"/>
+    <cs:effectRef idx="0"/>
+    <cs:fontRef idx="minor">
+      <a:schemeClr val="tx1">
+        <a:lumMod val="65000"/>
+        <a:lumOff val="35000"/>
+      </a:schemeClr>
+    </cs:fontRef>
+    <cs:spPr>
+      <a:ln w="9525" cap="flat" cmpd="sng" algn="ctr">
+        <a:solidFill>
+          <a:schemeClr val="tx1">
+            <a:lumMod val="15000"/>
+            <a:lumOff val="85000"/>
+          </a:schemeClr>
+        </a:solidFill>
+        <a:round/>
+      </a:ln>
+    </cs:spPr>
+    <cs:defRPr sz="1197"/>
+  </cs:seriesAxis>
+  <cs:seriesLine>
+    <cs:lnRef idx="0"/>
+    <cs:fillRef idx="0"/>
+    <cs:effectRef idx="0"/>
+    <cs:fontRef idx="minor">
+      <a:schemeClr val="tx1"/>
+    </cs:fontRef>
+    <cs:spPr>
+      <a:ln w="9525" cap="flat">
+        <a:solidFill>
+          <a:srgbClr val="D9D9D9"/>
+        </a:solidFill>
+        <a:round/>
+      </a:ln>
+    </cs:spPr>
+  </cs:seriesLine>
+  <cs:title>
+    <cs:lnRef idx="0"/>
+    <cs:fillRef idx="0"/>
+    <cs:effectRef idx="0"/>
+    <cs:fontRef idx="minor">
+      <a:schemeClr val="tx1">
+        <a:lumMod val="65000"/>
+        <a:lumOff val="35000"/>
+      </a:schemeClr>
+    </cs:fontRef>
+    <cs:defRPr sz="1862"/>
+  </cs:title>
+  <cs:trendline>
+    <cs:lnRef idx="0">
+      <cs:styleClr val="auto"/>
+    </cs:lnRef>
+    <cs:fillRef idx="0"/>
+    <cs:effectRef idx="0"/>
+    <cs:fontRef idx="minor">
+      <a:schemeClr val="tx1"/>
+    </cs:fontRef>
+    <cs:spPr>
+      <a:ln w="19050" cap="rnd">
+        <a:solidFill>
+          <a:schemeClr val="phClr"/>
+        </a:solidFill>
+        <a:prstDash val="sysDash"/>
+      </a:ln>
+    </cs:spPr>
+  </cs:trendline>
+  <cs:trendlineLabel>
+    <cs:lnRef idx="0"/>
+    <cs:fillRef idx="0"/>
+    <cs:effectRef idx="0"/>
+    <cs:fontRef idx="minor">
+      <a:schemeClr val="tx1">
+        <a:lumMod val="65000"/>
+        <a:lumOff val="35000"/>
+      </a:schemeClr>
+    </cs:fontRef>
+    <cs:defRPr sz="1197"/>
+  </cs:trendlineLabel>
+  <cs:upBar>
+    <cs:lnRef idx="0"/>
+    <cs:fillRef idx="0"/>
+    <cs:effectRef idx="0"/>
+    <cs:fontRef idx="minor">
+      <a:schemeClr val="dk1"/>
+    </cs:fontRef>
+    <cs:spPr>
+      <a:solidFill>
+        <a:schemeClr val="lt1"/>
+      </a:solidFill>
+      <a:ln w="9525">
+        <a:solidFill>
+          <a:schemeClr val="tx1">
+            <a:lumMod val="15000"/>
+            <a:lumOff val="85000"/>
+          </a:schemeClr>
+        </a:solidFill>
+      </a:ln>
+    </cs:spPr>
+  </cs:upBar>
+  <cs:valueAxis>
+    <cs:lnRef idx="0"/>
+    <cs:fillRef idx="0"/>
+    <cs:effectRef idx="0"/>
+    <cs:fontRef idx="minor">
+      <a:schemeClr val="tx1">
+        <a:lumMod val="65000"/>
+        <a:lumOff val="35000"/>
+      </a:schemeClr>
+    </cs:fontRef>
+    <cs:defRPr sz="1197"/>
+  </cs:valueAxis>
+  <cs:wall>
+    <cs:lnRef idx="0"/>
+    <cs:fillRef idx="0"/>
+    <cs:effectRef idx="0"/>
+    <cs:fontRef idx="minor">
+      <a:schemeClr val="tx1"/>
+    </cs:fontRef>
+  </cs:wall>
+</cs:chartStyle>
+</file>
+
+<file path=ppt/charts/style12.xml><?xml version="1.0" encoding="utf-8"?>
+<cs:chartStyle xmlns:cs="http://schemas.microsoft.com/office/drawing/2012/chartStyle" xmlns:a="http://schemas.openxmlformats.org/drawingml/2006/main" id="419">
+  <cs:axisTitle>
+    <cs:lnRef idx="0"/>
+    <cs:fillRef idx="0"/>
+    <cs:effectRef idx="0"/>
+    <cs:fontRef idx="minor">
+      <a:schemeClr val="tx1">
+        <a:lumMod val="65000"/>
+        <a:lumOff val="35000"/>
+      </a:schemeClr>
+    </cs:fontRef>
+    <cs:defRPr sz="1197"/>
+  </cs:axisTitle>
+  <cs:categoryAxis>
+    <cs:lnRef idx="0"/>
+    <cs:fillRef idx="0"/>
+    <cs:effectRef idx="0"/>
+    <cs:fontRef idx="minor">
+      <a:schemeClr val="tx1">
+        <a:lumMod val="65000"/>
+        <a:lumOff val="35000"/>
+      </a:schemeClr>
+    </cs:fontRef>
+    <cs:spPr>
+      <a:ln w="9525" cap="flat" cmpd="sng" algn="ctr">
+        <a:solidFill>
+          <a:schemeClr val="tx1">
+            <a:lumMod val="15000"/>
+            <a:lumOff val="85000"/>
+          </a:schemeClr>
+        </a:solidFill>
+        <a:round/>
+      </a:ln>
+    </cs:spPr>
+    <cs:defRPr sz="1197"/>
+  </cs:categoryAxis>
+  <cs:chartArea mods="allowNoFillOverride allowNoLineOverride">
+    <cs:lnRef idx="0"/>
+    <cs:fillRef idx="0"/>
+    <cs:effectRef idx="0"/>
+    <cs:fontRef idx="minor">
+      <a:schemeClr val="tx1"/>
+    </cs:fontRef>
+    <cs:spPr>
+      <a:solidFill>
+        <a:schemeClr val="bg1"/>
+      </a:solidFill>
+      <a:ln w="9525" cap="flat" cmpd="sng" algn="ctr">
+        <a:solidFill>
+          <a:schemeClr val="tx1">
+            <a:lumMod val="15000"/>
+            <a:lumOff val="85000"/>
+          </a:schemeClr>
+        </a:solidFill>
+        <a:round/>
+      </a:ln>
+    </cs:spPr>
+    <cs:defRPr sz="1330"/>
+  </cs:chartArea>
+  <cs:dataLabel>
+    <cs:lnRef idx="0"/>
+    <cs:fillRef idx="0"/>
+    <cs:effectRef idx="0"/>
+    <cs:fontRef idx="minor">
+      <a:schemeClr val="tx1">
+        <a:lumMod val="65000"/>
+        <a:lumOff val="35000"/>
+      </a:schemeClr>
+    </cs:fontRef>
+    <cs:defRPr sz="1197"/>
+  </cs:dataLabel>
+  <cs:dataLabelCallout>
+    <cs:lnRef idx="0"/>
+    <cs:fillRef idx="0"/>
+    <cs:effectRef idx="0"/>
+    <cs:fontRef idx="minor">
+      <a:schemeClr val="dk1">
+        <a:lumMod val="65000"/>
+        <a:lumOff val="35000"/>
+      </a:schemeClr>
+    </cs:fontRef>
+    <cs:spPr>
+      <a:solidFill>
+        <a:schemeClr val="lt1"/>
+      </a:solidFill>
+      <a:ln>
+        <a:solidFill>
+          <a:schemeClr val="dk1">
+            <a:lumMod val="25000"/>
+            <a:lumOff val="75000"/>
+          </a:schemeClr>
+        </a:solidFill>
+      </a:ln>
+    </cs:spPr>
+    <cs:defRPr sz="1197"/>
+    <cs:bodyPr rot="0" spcFirstLastPara="1" vertOverflow="clip" horzOverflow="clip" vert="horz" wrap="square" lIns="36576" tIns="18288" rIns="36576" bIns="18288" anchor="ctr" anchorCtr="1">
+      <a:spAutoFit/>
+    </cs:bodyPr>
+  </cs:dataLabelCallout>
+  <cs:dataPoint>
+    <cs:lnRef idx="0"/>
+    <cs:fillRef idx="0">
+      <cs:styleClr val="auto"/>
+    </cs:fillRef>
+    <cs:effectRef idx="0"/>
+    <cs:fontRef idx="minor">
+      <a:schemeClr val="tx1"/>
+    </cs:fontRef>
+    <cs:spPr>
+      <a:solidFill>
+        <a:schemeClr val="phClr"/>
+      </a:solidFill>
+    </cs:spPr>
+  </cs:dataPoint>
+  <cs:dataPoint3D>
+    <cs:lnRef idx="0"/>
+    <cs:fillRef idx="0">
+      <cs:styleClr val="auto"/>
+    </cs:fillRef>
+    <cs:effectRef idx="0"/>
+    <cs:fontRef idx="minor">
+      <a:schemeClr val="tx1"/>
+    </cs:fontRef>
+    <cs:spPr>
+      <a:solidFill>
+        <a:schemeClr val="phClr"/>
+      </a:solidFill>
+    </cs:spPr>
+  </cs:dataPoint3D>
+  <cs:dataPointLine>
+    <cs:lnRef idx="0">
+      <cs:styleClr val="auto"/>
+    </cs:lnRef>
+    <cs:fillRef idx="0"/>
+    <cs:effectRef idx="0"/>
+    <cs:fontRef idx="minor">
+      <a:schemeClr val="tx1"/>
+    </cs:fontRef>
+    <cs:spPr>
+      <a:ln w="28575" cap="rnd">
+        <a:solidFill>
+          <a:schemeClr val="phClr"/>
+        </a:solidFill>
+        <a:round/>
+      </a:ln>
+    </cs:spPr>
+  </cs:dataPointLine>
+  <cs:dataPointMarker>
+    <cs:lnRef idx="0"/>
+    <cs:fillRef idx="0">
+      <cs:styleClr val="auto"/>
+    </cs:fillRef>
+    <cs:effectRef idx="0"/>
+    <cs:fontRef idx="minor">
+      <a:schemeClr val="tx1"/>
+    </cs:fontRef>
+    <cs:spPr>
+      <a:solidFill>
+        <a:schemeClr val="phClr"/>
+      </a:solidFill>
+      <a:ln w="9525">
+        <a:solidFill>
+          <a:schemeClr val="lt1"/>
+        </a:solidFill>
+      </a:ln>
+    </cs:spPr>
+  </cs:dataPointMarker>
+  <cs:dataPointMarkerLayout symbol="circle" size="5"/>
+  <cs:dataPointWireframe>
+    <cs:lnRef idx="0">
+      <cs:styleClr val="auto"/>
+    </cs:lnRef>
+    <cs:fillRef idx="0"/>
+    <cs:effectRef idx="0"/>
+    <cs:fontRef idx="minor">
+      <a:schemeClr val="tx1"/>
+    </cs:fontRef>
+    <cs:spPr>
+      <a:ln w="28575" cap="rnd">
+        <a:solidFill>
+          <a:schemeClr val="phClr"/>
+        </a:solidFill>
+        <a:round/>
+      </a:ln>
+    </cs:spPr>
+  </cs:dataPointWireframe>
+  <cs:dataTable>
+    <cs:lnRef idx="0"/>
+    <cs:fillRef idx="0"/>
+    <cs:effectRef idx="0"/>
+    <cs:fontRef idx="minor">
+      <a:schemeClr val="tx1">
+        <a:lumMod val="65000"/>
+        <a:lumOff val="35000"/>
+      </a:schemeClr>
+    </cs:fontRef>
+    <cs:spPr>
+      <a:ln w="9525">
+        <a:solidFill>
+          <a:schemeClr val="tx1">
+            <a:lumMod val="15000"/>
+            <a:lumOff val="85000"/>
+          </a:schemeClr>
+        </a:solidFill>
+      </a:ln>
+    </cs:spPr>
+    <cs:defRPr sz="1197"/>
+  </cs:dataTable>
+  <cs:downBar>
+    <cs:lnRef idx="0"/>
+    <cs:fillRef idx="0"/>
+    <cs:effectRef idx="0"/>
+    <cs:fontRef idx="minor">
+      <a:schemeClr val="dk1"/>
+    </cs:fontRef>
+    <cs:spPr>
+      <a:solidFill>
+        <a:schemeClr val="dk1">
+          <a:lumMod val="65000"/>
+          <a:lumOff val="35000"/>
+        </a:schemeClr>
+      </a:solidFill>
+      <a:ln w="9525">
+        <a:solidFill>
+          <a:schemeClr val="tx1">
+            <a:lumMod val="65000"/>
+            <a:lumOff val="35000"/>
+          </a:schemeClr>
+        </a:solidFill>
+      </a:ln>
+    </cs:spPr>
+  </cs:downBar>
+  <cs:dropLine>
+    <cs:lnRef idx="0"/>
+    <cs:fillRef idx="0"/>
+    <cs:effectRef idx="0"/>
+    <cs:fontRef idx="minor">
+      <a:schemeClr val="tx1"/>
+    </cs:fontRef>
+    <cs:spPr>
+      <a:ln w="9525" cap="flat" cmpd="sng" algn="ctr">
+        <a:solidFill>
+          <a:schemeClr val="tx1">
+            <a:lumMod val="35000"/>
+            <a:lumOff val="65000"/>
+          </a:schemeClr>
+        </a:solidFill>
+        <a:round/>
+      </a:ln>
+    </cs:spPr>
+  </cs:dropLine>
+  <cs:errorBar>
+    <cs:lnRef idx="0"/>
+    <cs:fillRef idx="0"/>
+    <cs:effectRef idx="0"/>
+    <cs:fontRef idx="minor">
+      <a:schemeClr val="tx1"/>
+    </cs:fontRef>
+    <cs:spPr>
+      <a:ln w="9525" cap="flat" cmpd="sng" algn="ctr">
+        <a:solidFill>
+          <a:schemeClr val="tx1">
+            <a:lumMod val="65000"/>
+            <a:lumOff val="35000"/>
+          </a:schemeClr>
+        </a:solidFill>
+        <a:round/>
+      </a:ln>
+    </cs:spPr>
+  </cs:errorBar>
+  <cs:floor>
+    <cs:lnRef idx="0"/>
+    <cs:fillRef idx="0"/>
+    <cs:effectRef idx="0"/>
+    <cs:fontRef idx="minor">
+      <a:schemeClr val="tx1"/>
+    </cs:fontRef>
+  </cs:floor>
+  <cs:gridlineMajor>
+    <cs:lnRef idx="0"/>
+    <cs:fillRef idx="0"/>
+    <cs:effectRef idx="0"/>
+    <cs:fontRef idx="minor">
+      <a:schemeClr val="tx1"/>
+    </cs:fontRef>
+    <cs:spPr>
+      <a:ln w="9525" cap="flat" cmpd="sng" algn="ctr">
+        <a:solidFill>
+          <a:schemeClr val="tx1">
+            <a:lumMod val="15000"/>
+            <a:lumOff val="85000"/>
+          </a:schemeClr>
+        </a:solidFill>
+        <a:round/>
+      </a:ln>
+    </cs:spPr>
+  </cs:gridlineMajor>
+  <cs:gridlineMinor>
+    <cs:lnRef idx="0"/>
+    <cs:fillRef idx="0"/>
+    <cs:effectRef idx="0"/>
+    <cs:fontRef idx="minor">
+      <a:schemeClr val="tx1"/>
+    </cs:fontRef>
+    <cs:spPr>
+      <a:ln w="9525" cap="flat" cmpd="sng" algn="ctr">
+        <a:solidFill>
+          <a:schemeClr val="tx1">
+            <a:lumMod val="15000"/>
+            <a:lumOff val="85000"/>
+          </a:schemeClr>
+        </a:solidFill>
+        <a:round/>
+      </a:ln>
+    </cs:spPr>
+  </cs:gridlineMinor>
+  <cs:hiLoLine>
+    <cs:lnRef idx="0"/>
+    <cs:fillRef idx="0"/>
+    <cs:effectRef idx="0"/>
+    <cs:fontRef idx="minor">
+      <a:schemeClr val="tx1"/>
+    </cs:fontRef>
+    <cs:spPr>
+      <a:ln w="9525" cap="flat" cmpd="sng" algn="ctr">
+        <a:solidFill>
+          <a:schemeClr val="tx1">
+            <a:lumMod val="75000"/>
+            <a:lumOff val="25000"/>
+          </a:schemeClr>
+        </a:solidFill>
+        <a:round/>
+      </a:ln>
+    </cs:spPr>
+  </cs:hiLoLine>
+  <cs:leaderLine>
+    <cs:lnRef idx="0"/>
+    <cs:fillRef idx="0"/>
+    <cs:effectRef idx="0"/>
+    <cs:fontRef idx="minor">
+      <a:schemeClr val="tx1"/>
+    </cs:fontRef>
+    <cs:spPr>
+      <a:ln w="9525" cap="flat" cmpd="sng" algn="ctr">
+        <a:solidFill>
+          <a:schemeClr val="tx1">
+            <a:lumMod val="35000"/>
+            <a:lumOff val="65000"/>
+          </a:schemeClr>
+        </a:solidFill>
+        <a:round/>
+      </a:ln>
+    </cs:spPr>
+  </cs:leaderLine>
+  <cs:legend>
+    <cs:lnRef idx="0"/>
+    <cs:fillRef idx="0"/>
+    <cs:effectRef idx="0"/>
+    <cs:fontRef idx="minor">
+      <a:schemeClr val="tx1">
+        <a:lumMod val="65000"/>
+        <a:lumOff val="35000"/>
+      </a:schemeClr>
+    </cs:fontRef>
+    <cs:defRPr sz="1197"/>
+  </cs:legend>
+  <cs:plotArea mods="allowNoFillOverride allowNoLineOverride">
+    <cs:lnRef idx="0"/>
+    <cs:fillRef idx="0"/>
+    <cs:effectRef idx="0"/>
+    <cs:fontRef idx="minor">
+      <a:schemeClr val="tx1"/>
+    </cs:fontRef>
+  </cs:plotArea>
+  <cs:plotArea3D mods="allowNoFillOverride allowNoLineOverride">
+    <cs:lnRef idx="0"/>
+    <cs:fillRef idx="0"/>
+    <cs:effectRef idx="0"/>
+    <cs:fontRef idx="minor">
+      <a:schemeClr val="tx1"/>
+    </cs:fontRef>
+  </cs:plotArea3D>
+  <cs:seriesAxis>
+    <cs:lnRef idx="0"/>
+    <cs:fillRef idx="0"/>
+    <cs:effectRef idx="0"/>
+    <cs:fontRef idx="minor">
+      <a:schemeClr val="tx1">
+        <a:lumMod val="65000"/>
+        <a:lumOff val="35000"/>
+      </a:schemeClr>
+    </cs:fontRef>
+    <cs:spPr>
+      <a:ln w="9525" cap="flat" cmpd="sng" algn="ctr">
+        <a:solidFill>
+          <a:schemeClr val="tx1">
+            <a:lumMod val="15000"/>
+            <a:lumOff val="85000"/>
+          </a:schemeClr>
+        </a:solidFill>
+        <a:round/>
+      </a:ln>
+    </cs:spPr>
+    <cs:defRPr sz="1197"/>
+  </cs:seriesAxis>
+  <cs:seriesLine>
+    <cs:lnRef idx="0"/>
+    <cs:fillRef idx="0"/>
+    <cs:effectRef idx="0"/>
+    <cs:fontRef idx="minor">
+      <a:schemeClr val="tx1"/>
+    </cs:fontRef>
+    <cs:spPr>
+      <a:ln w="9525" cap="flat">
+        <a:solidFill>
+          <a:srgbClr val="D9D9D9"/>
+        </a:solidFill>
+        <a:round/>
+      </a:ln>
+    </cs:spPr>
+  </cs:seriesLine>
+  <cs:title>
+    <cs:lnRef idx="0"/>
+    <cs:fillRef idx="0"/>
+    <cs:effectRef idx="0"/>
+    <cs:fontRef idx="minor">
+      <a:schemeClr val="tx1">
+        <a:lumMod val="65000"/>
+        <a:lumOff val="35000"/>
+      </a:schemeClr>
+    </cs:fontRef>
+    <cs:defRPr sz="1862"/>
+  </cs:title>
+  <cs:trendline>
+    <cs:lnRef idx="0">
+      <cs:styleClr val="auto"/>
+    </cs:lnRef>
+    <cs:fillRef idx="0"/>
+    <cs:effectRef idx="0"/>
+    <cs:fontRef idx="minor">
+      <a:schemeClr val="tx1"/>
+    </cs:fontRef>
+    <cs:spPr>
+      <a:ln w="19050" cap="rnd">
+        <a:solidFill>
+          <a:schemeClr val="phClr"/>
+        </a:solidFill>
+        <a:prstDash val="sysDash"/>
+      </a:ln>
+    </cs:spPr>
+  </cs:trendline>
+  <cs:trendlineLabel>
+    <cs:lnRef idx="0"/>
+    <cs:fillRef idx="0"/>
+    <cs:effectRef idx="0"/>
+    <cs:fontRef idx="minor">
+      <a:schemeClr val="tx1">
+        <a:lumMod val="65000"/>
+        <a:lumOff val="35000"/>
+      </a:schemeClr>
+    </cs:fontRef>
+    <cs:defRPr sz="1197"/>
+  </cs:trendlineLabel>
+  <cs:upBar>
+    <cs:lnRef idx="0"/>
+    <cs:fillRef idx="0"/>
+    <cs:effectRef idx="0"/>
+    <cs:fontRef idx="minor">
+      <a:schemeClr val="dk1"/>
+    </cs:fontRef>
+    <cs:spPr>
+      <a:solidFill>
+        <a:schemeClr val="lt1"/>
+      </a:solidFill>
+      <a:ln w="9525">
+        <a:solidFill>
+          <a:schemeClr val="tx1">
+            <a:lumMod val="15000"/>
+            <a:lumOff val="85000"/>
+          </a:schemeClr>
+        </a:solidFill>
+      </a:ln>
+    </cs:spPr>
+  </cs:upBar>
+  <cs:valueAxis>
+    <cs:lnRef idx="0"/>
+    <cs:fillRef idx="0"/>
+    <cs:effectRef idx="0"/>
+    <cs:fontRef idx="minor">
+      <a:schemeClr val="tx1">
+        <a:lumMod val="65000"/>
+        <a:lumOff val="35000"/>
+      </a:schemeClr>
+    </cs:fontRef>
+    <cs:defRPr sz="1197"/>
+  </cs:valueAxis>
+  <cs:wall>
+    <cs:lnRef idx="0"/>
+    <cs:fillRef idx="0"/>
+    <cs:effectRef idx="0"/>
+    <cs:fontRef idx="minor">
+      <a:schemeClr val="tx1"/>
+    </cs:fontRef>
+  </cs:wall>
+</cs:chartStyle>
+</file>
+
+<file path=ppt/charts/style13.xml><?xml version="1.0" encoding="utf-8"?>
+<cs:chartStyle xmlns:cs="http://schemas.microsoft.com/office/drawing/2012/chartStyle" xmlns:a="http://schemas.openxmlformats.org/drawingml/2006/main" id="419">
+  <cs:axisTitle>
+    <cs:lnRef idx="0"/>
+    <cs:fillRef idx="0"/>
+    <cs:effectRef idx="0"/>
+    <cs:fontRef idx="minor">
+      <a:schemeClr val="tx1">
+        <a:lumMod val="65000"/>
+        <a:lumOff val="35000"/>
+      </a:schemeClr>
+    </cs:fontRef>
+    <cs:defRPr sz="1197"/>
+  </cs:axisTitle>
+  <cs:categoryAxis>
+    <cs:lnRef idx="0"/>
+    <cs:fillRef idx="0"/>
+    <cs:effectRef idx="0"/>
+    <cs:fontRef idx="minor">
+      <a:schemeClr val="tx1">
+        <a:lumMod val="65000"/>
+        <a:lumOff val="35000"/>
+      </a:schemeClr>
+    </cs:fontRef>
+    <cs:spPr>
+      <a:ln w="9525" cap="flat" cmpd="sng" algn="ctr">
+        <a:solidFill>
+          <a:schemeClr val="tx1">
+            <a:lumMod val="15000"/>
+            <a:lumOff val="85000"/>
+          </a:schemeClr>
+        </a:solidFill>
+        <a:round/>
+      </a:ln>
+    </cs:spPr>
+    <cs:defRPr sz="1197"/>
+  </cs:categoryAxis>
+  <cs:chartArea mods="allowNoFillOverride allowNoLineOverride">
+    <cs:lnRef idx="0"/>
+    <cs:fillRef idx="0"/>
+    <cs:effectRef idx="0"/>
+    <cs:fontRef idx="minor">
+      <a:schemeClr val="tx1"/>
+    </cs:fontRef>
+    <cs:spPr>
+      <a:solidFill>
+        <a:schemeClr val="bg1"/>
+      </a:solidFill>
+      <a:ln w="9525" cap="flat" cmpd="sng" algn="ctr">
+        <a:solidFill>
+          <a:schemeClr val="tx1">
+            <a:lumMod val="15000"/>
+            <a:lumOff val="85000"/>
+          </a:schemeClr>
+        </a:solidFill>
+        <a:round/>
+      </a:ln>
+    </cs:spPr>
+    <cs:defRPr sz="1330"/>
+  </cs:chartArea>
+  <cs:dataLabel>
+    <cs:lnRef idx="0"/>
+    <cs:fillRef idx="0"/>
+    <cs:effectRef idx="0"/>
+    <cs:fontRef idx="minor">
+      <a:schemeClr val="tx1">
+        <a:lumMod val="65000"/>
+        <a:lumOff val="35000"/>
+      </a:schemeClr>
+    </cs:fontRef>
+    <cs:defRPr sz="1197"/>
+  </cs:dataLabel>
+  <cs:dataLabelCallout>
+    <cs:lnRef idx="0"/>
+    <cs:fillRef idx="0"/>
+    <cs:effectRef idx="0"/>
+    <cs:fontRef idx="minor">
+      <a:schemeClr val="dk1">
+        <a:lumMod val="65000"/>
+        <a:lumOff val="35000"/>
+      </a:schemeClr>
+    </cs:fontRef>
+    <cs:spPr>
+      <a:solidFill>
+        <a:schemeClr val="lt1"/>
+      </a:solidFill>
+      <a:ln>
+        <a:solidFill>
+          <a:schemeClr val="dk1">
+            <a:lumMod val="25000"/>
+            <a:lumOff val="75000"/>
+          </a:schemeClr>
+        </a:solidFill>
+      </a:ln>
+    </cs:spPr>
+    <cs:defRPr sz="1197"/>
+    <cs:bodyPr rot="0" spcFirstLastPara="1" vertOverflow="clip" horzOverflow="clip" vert="horz" wrap="square" lIns="36576" tIns="18288" rIns="36576" bIns="18288" anchor="ctr" anchorCtr="1">
+      <a:spAutoFit/>
+    </cs:bodyPr>
+  </cs:dataLabelCallout>
+  <cs:dataPoint>
+    <cs:lnRef idx="0"/>
+    <cs:fillRef idx="0">
+      <cs:styleClr val="auto"/>
+    </cs:fillRef>
+    <cs:effectRef idx="0"/>
+    <cs:fontRef idx="minor">
+      <a:schemeClr val="tx1"/>
+    </cs:fontRef>
+    <cs:spPr>
+      <a:solidFill>
+        <a:schemeClr val="phClr"/>
+      </a:solidFill>
+    </cs:spPr>
+  </cs:dataPoint>
+  <cs:dataPoint3D>
+    <cs:lnRef idx="0"/>
+    <cs:fillRef idx="0">
+      <cs:styleClr val="auto"/>
+    </cs:fillRef>
+    <cs:effectRef idx="0"/>
+    <cs:fontRef idx="minor">
+      <a:schemeClr val="tx1"/>
+    </cs:fontRef>
+    <cs:spPr>
+      <a:solidFill>
+        <a:schemeClr val="phClr"/>
+      </a:solidFill>
+    </cs:spPr>
+  </cs:dataPoint3D>
+  <cs:dataPointLine>
+    <cs:lnRef idx="0">
+      <cs:styleClr val="auto"/>
+    </cs:lnRef>
+    <cs:fillRef idx="0"/>
+    <cs:effectRef idx="0"/>
+    <cs:fontRef idx="minor">
+      <a:schemeClr val="tx1"/>
+    </cs:fontRef>
+    <cs:spPr>
+      <a:ln w="28575" cap="rnd">
+        <a:solidFill>
+          <a:schemeClr val="phClr"/>
+        </a:solidFill>
+        <a:round/>
+      </a:ln>
+    </cs:spPr>
+  </cs:dataPointLine>
+  <cs:dataPointMarker>
+    <cs:lnRef idx="0"/>
+    <cs:fillRef idx="0">
+      <cs:styleClr val="auto"/>
+    </cs:fillRef>
+    <cs:effectRef idx="0"/>
+    <cs:fontRef idx="minor">
+      <a:schemeClr val="tx1"/>
+    </cs:fontRef>
+    <cs:spPr>
+      <a:solidFill>
+        <a:schemeClr val="phClr"/>
+      </a:solidFill>
+      <a:ln w="9525">
+        <a:solidFill>
+          <a:schemeClr val="lt1"/>
+        </a:solidFill>
+      </a:ln>
+    </cs:spPr>
+  </cs:dataPointMarker>
+  <cs:dataPointMarkerLayout symbol="circle" size="5"/>
+  <cs:dataPointWireframe>
+    <cs:lnRef idx="0">
+      <cs:styleClr val="auto"/>
+    </cs:lnRef>
+    <cs:fillRef idx="0"/>
+    <cs:effectRef idx="0"/>
+    <cs:fontRef idx="minor">
+      <a:schemeClr val="tx1"/>
+    </cs:fontRef>
+    <cs:spPr>
+      <a:ln w="28575" cap="rnd">
+        <a:solidFill>
+          <a:schemeClr val="phClr"/>
+        </a:solidFill>
+        <a:round/>
+      </a:ln>
+    </cs:spPr>
+  </cs:dataPointWireframe>
+  <cs:dataTable>
+    <cs:lnRef idx="0"/>
+    <cs:fillRef idx="0"/>
+    <cs:effectRef idx="0"/>
+    <cs:fontRef idx="minor">
+      <a:schemeClr val="tx1">
+        <a:lumMod val="65000"/>
+        <a:lumOff val="35000"/>
+      </a:schemeClr>
+    </cs:fontRef>
+    <cs:spPr>
+      <a:ln w="9525">
+        <a:solidFill>
+          <a:schemeClr val="tx1">
+            <a:lumMod val="15000"/>
+            <a:lumOff val="85000"/>
+          </a:schemeClr>
+        </a:solidFill>
+      </a:ln>
+    </cs:spPr>
+    <cs:defRPr sz="1197"/>
+  </cs:dataTable>
+  <cs:downBar>
+    <cs:lnRef idx="0"/>
+    <cs:fillRef idx="0"/>
+    <cs:effectRef idx="0"/>
+    <cs:fontRef idx="minor">
+      <a:schemeClr val="dk1"/>
+    </cs:fontRef>
+    <cs:spPr>
+      <a:solidFill>
+        <a:schemeClr val="dk1">
+          <a:lumMod val="65000"/>
+          <a:lumOff val="35000"/>
+        </a:schemeClr>
+      </a:solidFill>
+      <a:ln w="9525">
+        <a:solidFill>
+          <a:schemeClr val="tx1">
+            <a:lumMod val="65000"/>
+            <a:lumOff val="35000"/>
+          </a:schemeClr>
+        </a:solidFill>
+      </a:ln>
+    </cs:spPr>
+  </cs:downBar>
+  <cs:dropLine>
+    <cs:lnRef idx="0"/>
+    <cs:fillRef idx="0"/>
+    <cs:effectRef idx="0"/>
+    <cs:fontRef idx="minor">
+      <a:schemeClr val="tx1"/>
+    </cs:fontRef>
+    <cs:spPr>
+      <a:ln w="9525" cap="flat" cmpd="sng" algn="ctr">
+        <a:solidFill>
+          <a:schemeClr val="tx1">
+            <a:lumMod val="35000"/>
+            <a:lumOff val="65000"/>
+          </a:schemeClr>
+        </a:solidFill>
+        <a:round/>
+      </a:ln>
+    </cs:spPr>
+  </cs:dropLine>
+  <cs:errorBar>
+    <cs:lnRef idx="0"/>
+    <cs:fillRef idx="0"/>
+    <cs:effectRef idx="0"/>
+    <cs:fontRef idx="minor">
+      <a:schemeClr val="tx1"/>
+    </cs:fontRef>
+    <cs:spPr>
+      <a:ln w="9525" cap="flat" cmpd="sng" algn="ctr">
+        <a:solidFill>
+          <a:schemeClr val="tx1">
+            <a:lumMod val="65000"/>
+            <a:lumOff val="35000"/>
+          </a:schemeClr>
+        </a:solidFill>
+        <a:round/>
+      </a:ln>
+    </cs:spPr>
+  </cs:errorBar>
+  <cs:floor>
+    <cs:lnRef idx="0"/>
+    <cs:fillRef idx="0"/>
+    <cs:effectRef idx="0"/>
+    <cs:fontRef idx="minor">
+      <a:schemeClr val="tx1"/>
+    </cs:fontRef>
+  </cs:floor>
+  <cs:gridlineMajor>
+    <cs:lnRef idx="0"/>
+    <cs:fillRef idx="0"/>
+    <cs:effectRef idx="0"/>
+    <cs:fontRef idx="minor">
+      <a:schemeClr val="tx1"/>
+    </cs:fontRef>
+    <cs:spPr>
+      <a:ln w="9525" cap="flat" cmpd="sng" algn="ctr">
+        <a:solidFill>
+          <a:schemeClr val="tx1">
+            <a:lumMod val="15000"/>
+            <a:lumOff val="85000"/>
+          </a:schemeClr>
+        </a:solidFill>
+        <a:round/>
+      </a:ln>
+    </cs:spPr>
+  </cs:gridlineMajor>
+  <cs:gridlineMinor>
+    <cs:lnRef idx="0"/>
+    <cs:fillRef idx="0"/>
+    <cs:effectRef idx="0"/>
+    <cs:fontRef idx="minor">
+      <a:schemeClr val="tx1"/>
+    </cs:fontRef>
+    <cs:spPr>
+      <a:ln w="9525" cap="flat" cmpd="sng" algn="ctr">
+        <a:solidFill>
+          <a:schemeClr val="tx1">
+            <a:lumMod val="15000"/>
+            <a:lumOff val="85000"/>
+          </a:schemeClr>
+        </a:solidFill>
+        <a:round/>
+      </a:ln>
+    </cs:spPr>
+  </cs:gridlineMinor>
+  <cs:hiLoLine>
+    <cs:lnRef idx="0"/>
+    <cs:fillRef idx="0"/>
+    <cs:effectRef idx="0"/>
+    <cs:fontRef idx="minor">
+      <a:schemeClr val="tx1"/>
+    </cs:fontRef>
+    <cs:spPr>
+      <a:ln w="9525" cap="flat" cmpd="sng" algn="ctr">
+        <a:solidFill>
+          <a:schemeClr val="tx1">
+            <a:lumMod val="75000"/>
+            <a:lumOff val="25000"/>
+          </a:schemeClr>
+        </a:solidFill>
+        <a:round/>
+      </a:ln>
+    </cs:spPr>
+  </cs:hiLoLine>
+  <cs:leaderLine>
+    <cs:lnRef idx="0"/>
+    <cs:fillRef idx="0"/>
+    <cs:effectRef idx="0"/>
+    <cs:fontRef idx="minor">
+      <a:schemeClr val="tx1"/>
+    </cs:fontRef>
+    <cs:spPr>
+      <a:ln w="9525" cap="flat" cmpd="sng" algn="ctr">
+        <a:solidFill>
+          <a:schemeClr val="tx1">
+            <a:lumMod val="35000"/>
+            <a:lumOff val="65000"/>
+          </a:schemeClr>
+        </a:solidFill>
+        <a:round/>
+      </a:ln>
+    </cs:spPr>
+  </cs:leaderLine>
+  <cs:legend>
+    <cs:lnRef idx="0"/>
+    <cs:fillRef idx="0"/>
+    <cs:effectRef idx="0"/>
+    <cs:fontRef idx="minor">
+      <a:schemeClr val="tx1">
+        <a:lumMod val="65000"/>
+        <a:lumOff val="35000"/>
+      </a:schemeClr>
+    </cs:fontRef>
+    <cs:defRPr sz="1197"/>
+  </cs:legend>
+  <cs:plotArea mods="allowNoFillOverride allowNoLineOverride">
+    <cs:lnRef idx="0"/>
+    <cs:fillRef idx="0"/>
+    <cs:effectRef idx="0"/>
+    <cs:fontRef idx="minor">
+      <a:schemeClr val="tx1"/>
+    </cs:fontRef>
+  </cs:plotArea>
+  <cs:plotArea3D mods="allowNoFillOverride allowNoLineOverride">
+    <cs:lnRef idx="0"/>
+    <cs:fillRef idx="0"/>
+    <cs:effectRef idx="0"/>
+    <cs:fontRef idx="minor">
+      <a:schemeClr val="tx1"/>
+    </cs:fontRef>
+  </cs:plotArea3D>
+  <cs:seriesAxis>
+    <cs:lnRef idx="0"/>
+    <cs:fillRef idx="0"/>
+    <cs:effectRef idx="0"/>
+    <cs:fontRef idx="minor">
+      <a:schemeClr val="tx1">
+        <a:lumMod val="65000"/>
+        <a:lumOff val="35000"/>
+      </a:schemeClr>
+    </cs:fontRef>
+    <cs:spPr>
+      <a:ln w="9525" cap="flat" cmpd="sng" algn="ctr">
+        <a:solidFill>
+          <a:schemeClr val="tx1">
+            <a:lumMod val="15000"/>
+            <a:lumOff val="85000"/>
+          </a:schemeClr>
+        </a:solidFill>
+        <a:round/>
+      </a:ln>
+    </cs:spPr>
+    <cs:defRPr sz="1197"/>
+  </cs:seriesAxis>
+  <cs:seriesLine>
+    <cs:lnRef idx="0"/>
+    <cs:fillRef idx="0"/>
+    <cs:effectRef idx="0"/>
+    <cs:fontRef idx="minor">
+      <a:schemeClr val="tx1"/>
+    </cs:fontRef>
+    <cs:spPr>
+      <a:ln w="9525" cap="flat">
+        <a:solidFill>
+          <a:srgbClr val="D9D9D9"/>
+        </a:solidFill>
+        <a:round/>
+      </a:ln>
+    </cs:spPr>
+  </cs:seriesLine>
+  <cs:title>
+    <cs:lnRef idx="0"/>
+    <cs:fillRef idx="0"/>
+    <cs:effectRef idx="0"/>
+    <cs:fontRef idx="minor">
+      <a:schemeClr val="tx1">
+        <a:lumMod val="65000"/>
+        <a:lumOff val="35000"/>
+      </a:schemeClr>
+    </cs:fontRef>
+    <cs:defRPr sz="1862"/>
+  </cs:title>
+  <cs:trendline>
+    <cs:lnRef idx="0">
+      <cs:styleClr val="auto"/>
+    </cs:lnRef>
+    <cs:fillRef idx="0"/>
+    <cs:effectRef idx="0"/>
+    <cs:fontRef idx="minor">
+      <a:schemeClr val="tx1"/>
+    </cs:fontRef>
+    <cs:spPr>
+      <a:ln w="19050" cap="rnd">
+        <a:solidFill>
+          <a:schemeClr val="phClr"/>
+        </a:solidFill>
+        <a:prstDash val="sysDash"/>
+      </a:ln>
+    </cs:spPr>
+  </cs:trendline>
+  <cs:trendlineLabel>
+    <cs:lnRef idx="0"/>
+    <cs:fillRef idx="0"/>
+    <cs:effectRef idx="0"/>
+    <cs:fontRef idx="minor">
+      <a:schemeClr val="tx1">
+        <a:lumMod val="65000"/>
+        <a:lumOff val="35000"/>
+      </a:schemeClr>
+    </cs:fontRef>
+    <cs:defRPr sz="1197"/>
+  </cs:trendlineLabel>
+  <cs:upBar>
+    <cs:lnRef idx="0"/>
+    <cs:fillRef idx="0"/>
+    <cs:effectRef idx="0"/>
+    <cs:fontRef idx="minor">
+      <a:schemeClr val="dk1"/>
+    </cs:fontRef>
+    <cs:spPr>
+      <a:solidFill>
+        <a:schemeClr val="lt1"/>
+      </a:solidFill>
+      <a:ln w="9525">
+        <a:solidFill>
+          <a:schemeClr val="tx1">
+            <a:lumMod val="15000"/>
+            <a:lumOff val="85000"/>
+          </a:schemeClr>
+        </a:solidFill>
+      </a:ln>
+    </cs:spPr>
+  </cs:upBar>
+  <cs:valueAxis>
+    <cs:lnRef idx="0"/>
+    <cs:fillRef idx="0"/>
+    <cs:effectRef idx="0"/>
+    <cs:fontRef idx="minor">
+      <a:schemeClr val="tx1">
+        <a:lumMod val="65000"/>
+        <a:lumOff val="35000"/>
+      </a:schemeClr>
+    </cs:fontRef>
+    <cs:defRPr sz="1197"/>
+  </cs:valueAxis>
+  <cs:wall>
+    <cs:lnRef idx="0"/>
+    <cs:fillRef idx="0"/>
+    <cs:effectRef idx="0"/>
+    <cs:fontRef idx="minor">
+      <a:schemeClr val="tx1"/>
+    </cs:fontRef>
+  </cs:wall>
+</cs:chartStyle>
+</file>
+
+<file path=ppt/charts/style14.xml><?xml version="1.0" encoding="utf-8"?>
+<cs:chartStyle xmlns:cs="http://schemas.microsoft.com/office/drawing/2012/chartStyle" xmlns:a="http://schemas.openxmlformats.org/drawingml/2006/main" id="419">
+  <cs:axisTitle>
+    <cs:lnRef idx="0"/>
+    <cs:fillRef idx="0"/>
+    <cs:effectRef idx="0"/>
+    <cs:fontRef idx="minor">
+      <a:schemeClr val="tx1">
+        <a:lumMod val="65000"/>
+        <a:lumOff val="35000"/>
+      </a:schemeClr>
+    </cs:fontRef>
+    <cs:defRPr sz="1197"/>
+  </cs:axisTitle>
+  <cs:categoryAxis>
+    <cs:lnRef idx="0"/>
+    <cs:fillRef idx="0"/>
+    <cs:effectRef idx="0"/>
+    <cs:fontRef idx="minor">
+      <a:schemeClr val="tx1">
+        <a:lumMod val="65000"/>
+        <a:lumOff val="35000"/>
+      </a:schemeClr>
+    </cs:fontRef>
+    <cs:spPr>
+      <a:ln w="9525" cap="flat" cmpd="sng" algn="ctr">
+        <a:solidFill>
+          <a:schemeClr val="tx1">
+            <a:lumMod val="15000"/>
+            <a:lumOff val="85000"/>
+          </a:schemeClr>
+        </a:solidFill>
+        <a:round/>
+      </a:ln>
+    </cs:spPr>
+    <cs:defRPr sz="1197"/>
+  </cs:categoryAxis>
+  <cs:chartArea mods="allowNoFillOverride allowNoLineOverride">
+    <cs:lnRef idx="0"/>
+    <cs:fillRef idx="0"/>
+    <cs:effectRef idx="0"/>
+    <cs:fontRef idx="minor">
+      <a:schemeClr val="tx1"/>
+    </cs:fontRef>
+    <cs:spPr>
+      <a:solidFill>
+        <a:schemeClr val="bg1"/>
+      </a:solidFill>
+      <a:ln w="9525" cap="flat" cmpd="sng" algn="ctr">
+        <a:solidFill>
+          <a:schemeClr val="tx1">
+            <a:lumMod val="15000"/>
+            <a:lumOff val="85000"/>
+          </a:schemeClr>
+        </a:solidFill>
+        <a:round/>
+      </a:ln>
+    </cs:spPr>
+    <cs:defRPr sz="1330"/>
+  </cs:chartArea>
+  <cs:dataLabel>
+    <cs:lnRef idx="0"/>
+    <cs:fillRef idx="0"/>
+    <cs:effectRef idx="0"/>
+    <cs:fontRef idx="minor">
+      <a:schemeClr val="tx1">
+        <a:lumMod val="65000"/>
+        <a:lumOff val="35000"/>
+      </a:schemeClr>
+    </cs:fontRef>
+    <cs:defRPr sz="1197"/>
+  </cs:dataLabel>
+  <cs:dataLabelCallout>
+    <cs:lnRef idx="0"/>
+    <cs:fillRef idx="0"/>
+    <cs:effectRef idx="0"/>
+    <cs:fontRef idx="minor">
+      <a:schemeClr val="dk1">
+        <a:lumMod val="65000"/>
+        <a:lumOff val="35000"/>
+      </a:schemeClr>
+    </cs:fontRef>
+    <cs:spPr>
+      <a:solidFill>
+        <a:schemeClr val="lt1"/>
+      </a:solidFill>
+      <a:ln>
+        <a:solidFill>
+          <a:schemeClr val="dk1">
+            <a:lumMod val="25000"/>
+            <a:lumOff val="75000"/>
+          </a:schemeClr>
+        </a:solidFill>
+      </a:ln>
+    </cs:spPr>
+    <cs:defRPr sz="1197"/>
+    <cs:bodyPr rot="0" spcFirstLastPara="1" vertOverflow="clip" horzOverflow="clip" vert="horz" wrap="square" lIns="36576" tIns="18288" rIns="36576" bIns="18288" anchor="ctr" anchorCtr="1">
+      <a:spAutoFit/>
+    </cs:bodyPr>
+  </cs:dataLabelCallout>
+  <cs:dataPoint>
+    <cs:lnRef idx="0"/>
+    <cs:fillRef idx="0">
+      <cs:styleClr val="auto"/>
+    </cs:fillRef>
+    <cs:effectRef idx="0"/>
+    <cs:fontRef idx="minor">
+      <a:schemeClr val="tx1"/>
+    </cs:fontRef>
+    <cs:spPr>
+      <a:solidFill>
+        <a:schemeClr val="phClr"/>
+      </a:solidFill>
+    </cs:spPr>
+  </cs:dataPoint>
+  <cs:dataPoint3D>
+    <cs:lnRef idx="0"/>
+    <cs:fillRef idx="0">
+      <cs:styleClr val="auto"/>
+    </cs:fillRef>
+    <cs:effectRef idx="0"/>
+    <cs:fontRef idx="minor">
+      <a:schemeClr val="tx1"/>
+    </cs:fontRef>
+    <cs:spPr>
+      <a:solidFill>
+        <a:schemeClr val="phClr"/>
+      </a:solidFill>
+    </cs:spPr>
+  </cs:dataPoint3D>
+  <cs:dataPointLine>
+    <cs:lnRef idx="0">
+      <cs:styleClr val="auto"/>
+    </cs:lnRef>
+    <cs:fillRef idx="0"/>
+    <cs:effectRef idx="0"/>
+    <cs:fontRef idx="minor">
+      <a:schemeClr val="tx1"/>
+    </cs:fontRef>
+    <cs:spPr>
+      <a:ln w="28575" cap="rnd">
+        <a:solidFill>
+          <a:schemeClr val="phClr"/>
+        </a:solidFill>
+        <a:round/>
+      </a:ln>
+    </cs:spPr>
+  </cs:dataPointLine>
+  <cs:dataPointMarker>
+    <cs:lnRef idx="0"/>
+    <cs:fillRef idx="0">
+      <cs:styleClr val="auto"/>
+    </cs:fillRef>
+    <cs:effectRef idx="0"/>
+    <cs:fontRef idx="minor">
+      <a:schemeClr val="tx1"/>
+    </cs:fontRef>
+    <cs:spPr>
+      <a:solidFill>
+        <a:schemeClr val="phClr"/>
+      </a:solidFill>
+      <a:ln w="9525">
+        <a:solidFill>
+          <a:schemeClr val="lt1"/>
+        </a:solidFill>
+      </a:ln>
+    </cs:spPr>
+  </cs:dataPointMarker>
+  <cs:dataPointMarkerLayout symbol="circle" size="5"/>
+  <cs:dataPointWireframe>
+    <cs:lnRef idx="0">
+      <cs:styleClr val="auto"/>
+    </cs:lnRef>
+    <cs:fillRef idx="0"/>
+    <cs:effectRef idx="0"/>
+    <cs:fontRef idx="minor">
+      <a:schemeClr val="tx1"/>
+    </cs:fontRef>
+    <cs:spPr>
+      <a:ln w="28575" cap="rnd">
+        <a:solidFill>
+          <a:schemeClr val="phClr"/>
+        </a:solidFill>
+        <a:round/>
+      </a:ln>
+    </cs:spPr>
+  </cs:dataPointWireframe>
+  <cs:dataTable>
+    <cs:lnRef idx="0"/>
+    <cs:fillRef idx="0"/>
+    <cs:effectRef idx="0"/>
+    <cs:fontRef idx="minor">
+      <a:schemeClr val="tx1">
+        <a:lumMod val="65000"/>
+        <a:lumOff val="35000"/>
+      </a:schemeClr>
+    </cs:fontRef>
+    <cs:spPr>
+      <a:ln w="9525">
+        <a:solidFill>
+          <a:schemeClr val="tx1">
+            <a:lumMod val="15000"/>
+            <a:lumOff val="85000"/>
+          </a:schemeClr>
+        </a:solidFill>
+      </a:ln>
+    </cs:spPr>
+    <cs:defRPr sz="1197"/>
+  </cs:dataTable>
+  <cs:downBar>
+    <cs:lnRef idx="0"/>
+    <cs:fillRef idx="0"/>
+    <cs:effectRef idx="0"/>
+    <cs:fontRef idx="minor">
+      <a:schemeClr val="dk1"/>
+    </cs:fontRef>
+    <cs:spPr>
+      <a:solidFill>
+        <a:schemeClr val="dk1">
+          <a:lumMod val="65000"/>
+          <a:lumOff val="35000"/>
+        </a:schemeClr>
+      </a:solidFill>
+      <a:ln w="9525">
+        <a:solidFill>
+          <a:schemeClr val="tx1">
+            <a:lumMod val="65000"/>
+            <a:lumOff val="35000"/>
+          </a:schemeClr>
+        </a:solidFill>
+      </a:ln>
+    </cs:spPr>
+  </cs:downBar>
+  <cs:dropLine>
+    <cs:lnRef idx="0"/>
+    <cs:fillRef idx="0"/>
+    <cs:effectRef idx="0"/>
+    <cs:fontRef idx="minor">
+      <a:schemeClr val="tx1"/>
+    </cs:fontRef>
+    <cs:spPr>
+      <a:ln w="9525" cap="flat" cmpd="sng" algn="ctr">
+        <a:solidFill>
+          <a:schemeClr val="tx1">
+            <a:lumMod val="35000"/>
+            <a:lumOff val="65000"/>
+          </a:schemeClr>
+        </a:solidFill>
+        <a:round/>
+      </a:ln>
+    </cs:spPr>
+  </cs:dropLine>
+  <cs:errorBar>
+    <cs:lnRef idx="0"/>
+    <cs:fillRef idx="0"/>
+    <cs:effectRef idx="0"/>
+    <cs:fontRef idx="minor">
+      <a:schemeClr val="tx1"/>
+    </cs:fontRef>
+    <cs:spPr>
+      <a:ln w="9525" cap="flat" cmpd="sng" algn="ctr">
+        <a:solidFill>
+          <a:schemeClr val="tx1">
+            <a:lumMod val="65000"/>
+            <a:lumOff val="35000"/>
+          </a:schemeClr>
+        </a:solidFill>
+        <a:round/>
+      </a:ln>
+    </cs:spPr>
+  </cs:errorBar>
+  <cs:floor>
+    <cs:lnRef idx="0"/>
+    <cs:fillRef idx="0"/>
+    <cs:effectRef idx="0"/>
+    <cs:fontRef idx="minor">
+      <a:schemeClr val="tx1"/>
+    </cs:fontRef>
+  </cs:floor>
+  <cs:gridlineMajor>
+    <cs:lnRef idx="0"/>
+    <cs:fillRef idx="0"/>
+    <cs:effectRef idx="0"/>
+    <cs:fontRef idx="minor">
+      <a:schemeClr val="tx1"/>
+    </cs:fontRef>
+    <cs:spPr>
+      <a:ln w="9525" cap="flat" cmpd="sng" algn="ctr">
+        <a:solidFill>
+          <a:schemeClr val="tx1">
+            <a:lumMod val="15000"/>
+            <a:lumOff val="85000"/>
+          </a:schemeClr>
+        </a:solidFill>
+        <a:round/>
+      </a:ln>
+    </cs:spPr>
+  </cs:gridlineMajor>
+  <cs:gridlineMinor>
+    <cs:lnRef idx="0"/>
+    <cs:fillRef idx="0"/>
+    <cs:effectRef idx="0"/>
+    <cs:fontRef idx="minor">
+      <a:schemeClr val="tx1"/>
+    </cs:fontRef>
+    <cs:spPr>
+      <a:ln w="9525" cap="flat" cmpd="sng" algn="ctr">
+        <a:solidFill>
+          <a:schemeClr val="tx1">
+            <a:lumMod val="15000"/>
+            <a:lumOff val="85000"/>
+          </a:schemeClr>
+        </a:solidFill>
+        <a:round/>
+      </a:ln>
+    </cs:spPr>
+  </cs:gridlineMinor>
+  <cs:hiLoLine>
+    <cs:lnRef idx="0"/>
+    <cs:fillRef idx="0"/>
+    <cs:effectRef idx="0"/>
+    <cs:fontRef idx="minor">
+      <a:schemeClr val="tx1"/>
+    </cs:fontRef>
+    <cs:spPr>
+      <a:ln w="9525" cap="flat" cmpd="sng" algn="ctr">
+        <a:solidFill>
+          <a:schemeClr val="tx1">
+            <a:lumMod val="75000"/>
+            <a:lumOff val="25000"/>
+          </a:schemeClr>
+        </a:solidFill>
+        <a:round/>
+      </a:ln>
+    </cs:spPr>
+  </cs:hiLoLine>
+  <cs:leaderLine>
+    <cs:lnRef idx="0"/>
+    <cs:fillRef idx="0"/>
+    <cs:effectRef idx="0"/>
+    <cs:fontRef idx="minor">
+      <a:schemeClr val="tx1"/>
+    </cs:fontRef>
+    <cs:spPr>
+      <a:ln w="9525" cap="flat" cmpd="sng" algn="ctr">
+        <a:solidFill>
+          <a:schemeClr val="tx1">
+            <a:lumMod val="35000"/>
+            <a:lumOff val="65000"/>
+          </a:schemeClr>
+        </a:solidFill>
+        <a:round/>
+      </a:ln>
+    </cs:spPr>
+  </cs:leaderLine>
+  <cs:legend>
+    <cs:lnRef idx="0"/>
+    <cs:fillRef idx="0"/>
+    <cs:effectRef idx="0"/>
+    <cs:fontRef idx="minor">
+      <a:schemeClr val="tx1">
+        <a:lumMod val="65000"/>
+        <a:lumOff val="35000"/>
+      </a:schemeClr>
+    </cs:fontRef>
+    <cs:defRPr sz="1197"/>
+  </cs:legend>
+  <cs:plotArea mods="allowNoFillOverride allowNoLineOverride">
+    <cs:lnRef idx="0"/>
+    <cs:fillRef idx="0"/>
+    <cs:effectRef idx="0"/>
+    <cs:fontRef idx="minor">
+      <a:schemeClr val="tx1"/>
+    </cs:fontRef>
+  </cs:plotArea>
+  <cs:plotArea3D mods="allowNoFillOverride allowNoLineOverride">
+    <cs:lnRef idx="0"/>
+    <cs:fillRef idx="0"/>
+    <cs:effectRef idx="0"/>
+    <cs:fontRef idx="minor">
+      <a:schemeClr val="tx1"/>
+    </cs:fontRef>
+  </cs:plotArea3D>
+  <cs:seriesAxis>
+    <cs:lnRef idx="0"/>
+    <cs:fillRef idx="0"/>
+    <cs:effectRef idx="0"/>
+    <cs:fontRef idx="minor">
+      <a:schemeClr val="tx1">
+        <a:lumMod val="65000"/>
+        <a:lumOff val="35000"/>
+      </a:schemeClr>
+    </cs:fontRef>
+    <cs:spPr>
+      <a:ln w="9525" cap="flat" cmpd="sng" algn="ctr">
+        <a:solidFill>
+          <a:schemeClr val="tx1">
+            <a:lumMod val="15000"/>
+            <a:lumOff val="85000"/>
+          </a:schemeClr>
+        </a:solidFill>
+        <a:round/>
+      </a:ln>
+    </cs:spPr>
+    <cs:defRPr sz="1197"/>
+  </cs:seriesAxis>
+  <cs:seriesLine>
+    <cs:lnRef idx="0"/>
+    <cs:fillRef idx="0"/>
+    <cs:effectRef idx="0"/>
+    <cs:fontRef idx="minor">
+      <a:schemeClr val="tx1"/>
+    </cs:fontRef>
+    <cs:spPr>
+      <a:ln w="9525" cap="flat">
+        <a:solidFill>
+          <a:srgbClr val="D9D9D9"/>
+        </a:solidFill>
+        <a:round/>
+      </a:ln>
+    </cs:spPr>
+  </cs:seriesLine>
+  <cs:title>
+    <cs:lnRef idx="0"/>
+    <cs:fillRef idx="0"/>
+    <cs:effectRef idx="0"/>
+    <cs:fontRef idx="minor">
+      <a:schemeClr val="tx1">
+        <a:lumMod val="65000"/>
+        <a:lumOff val="35000"/>
+      </a:schemeClr>
+    </cs:fontRef>
+    <cs:defRPr sz="1862"/>
+  </cs:title>
+  <cs:trendline>
+    <cs:lnRef idx="0">
+      <cs:styleClr val="auto"/>
+    </cs:lnRef>
+    <cs:fillRef idx="0"/>
+    <cs:effectRef idx="0"/>
+    <cs:fontRef idx="minor">
+      <a:schemeClr val="tx1"/>
+    </cs:fontRef>
+    <cs:spPr>
+      <a:ln w="19050" cap="rnd">
+        <a:solidFill>
+          <a:schemeClr val="phClr"/>
+        </a:solidFill>
+        <a:prstDash val="sysDash"/>
+      </a:ln>
+    </cs:spPr>
+  </cs:trendline>
+  <cs:trendlineLabel>
+    <cs:lnRef idx="0"/>
+    <cs:fillRef idx="0"/>
+    <cs:effectRef idx="0"/>
+    <cs:fontRef idx="minor">
+      <a:schemeClr val="tx1">
+        <a:lumMod val="65000"/>
+        <a:lumOff val="35000"/>
+      </a:schemeClr>
+    </cs:fontRef>
+    <cs:defRPr sz="1197"/>
+  </cs:trendlineLabel>
+  <cs:upBar>
+    <cs:lnRef idx="0"/>
+    <cs:fillRef idx="0"/>
+    <cs:effectRef idx="0"/>
+    <cs:fontRef idx="minor">
+      <a:schemeClr val="dk1"/>
+    </cs:fontRef>
+    <cs:spPr>
+      <a:solidFill>
+        <a:schemeClr val="lt1"/>
+      </a:solidFill>
+      <a:ln w="9525">
+        <a:solidFill>
+          <a:schemeClr val="tx1">
+            <a:lumMod val="15000"/>
+            <a:lumOff val="85000"/>
+          </a:schemeClr>
+        </a:solidFill>
+      </a:ln>
+    </cs:spPr>
+  </cs:upBar>
+  <cs:valueAxis>
+    <cs:lnRef idx="0"/>
+    <cs:fillRef idx="0"/>
+    <cs:effectRef idx="0"/>
+    <cs:fontRef idx="minor">
+      <a:schemeClr val="tx1">
+        <a:lumMod val="65000"/>
+        <a:lumOff val="35000"/>
+      </a:schemeClr>
+    </cs:fontRef>
+    <cs:defRPr sz="1197"/>
+  </cs:valueAxis>
+  <cs:wall>
+    <cs:lnRef idx="0"/>
+    <cs:fillRef idx="0"/>
+    <cs:effectRef idx="0"/>
+    <cs:fontRef idx="minor">
+      <a:schemeClr val="tx1"/>
+    </cs:fontRef>
+  </cs:wall>
+</cs:chartStyle>
+</file>
+
+<file path=ppt/charts/style18.xml><?xml version="1.0" encoding="utf-8"?>
+<cs:chartStyle xmlns:cs="http://schemas.microsoft.com/office/drawing/2012/chartStyle" xmlns:a="http://schemas.openxmlformats.org/drawingml/2006/main" id="419">
+  <cs:axisTitle>
+    <cs:lnRef idx="0"/>
+    <cs:fillRef idx="0"/>
+    <cs:effectRef idx="0"/>
+    <cs:fontRef idx="minor">
+      <a:schemeClr val="tx1">
+        <a:lumMod val="65000"/>
+        <a:lumOff val="35000"/>
+      </a:schemeClr>
+    </cs:fontRef>
+    <cs:defRPr sz="1197"/>
+  </cs:axisTitle>
+  <cs:categoryAxis>
+    <cs:lnRef idx="0"/>
+    <cs:fillRef idx="0"/>
+    <cs:effectRef idx="0"/>
+    <cs:fontRef idx="minor">
+      <a:schemeClr val="tx1">
+        <a:lumMod val="65000"/>
+        <a:lumOff val="35000"/>
+      </a:schemeClr>
+    </cs:fontRef>
+    <cs:spPr>
+      <a:ln w="9525" cap="flat" cmpd="sng" algn="ctr">
+        <a:solidFill>
+          <a:schemeClr val="tx1">
+            <a:lumMod val="15000"/>
+            <a:lumOff val="85000"/>
+          </a:schemeClr>
+        </a:solidFill>
+        <a:round/>
+      </a:ln>
+    </cs:spPr>
+    <cs:defRPr sz="1197"/>
+  </cs:categoryAxis>
+  <cs:chartArea mods="allowNoFillOverride allowNoLineOverride">
+    <cs:lnRef idx="0"/>
+    <cs:fillRef idx="0"/>
+    <cs:effectRef idx="0"/>
+    <cs:fontRef idx="minor">
+      <a:schemeClr val="tx1"/>
+    </cs:fontRef>
+    <cs:spPr>
+      <a:solidFill>
+        <a:schemeClr val="bg1"/>
+      </a:solidFill>
+      <a:ln w="9525" cap="flat" cmpd="sng" algn="ctr">
+        <a:solidFill>
+          <a:schemeClr val="tx1">
+            <a:lumMod val="15000"/>
+            <a:lumOff val="85000"/>
+          </a:schemeClr>
+        </a:solidFill>
+        <a:round/>
+      </a:ln>
+    </cs:spPr>
+    <cs:defRPr sz="1330"/>
+  </cs:chartArea>
+  <cs:dataLabel>
+    <cs:lnRef idx="0"/>
+    <cs:fillRef idx="0"/>
+    <cs:effectRef idx="0"/>
+    <cs:fontRef idx="minor">
+      <a:schemeClr val="tx1">
+        <a:lumMod val="65000"/>
+        <a:lumOff val="35000"/>
+      </a:schemeClr>
+    </cs:fontRef>
+    <cs:defRPr sz="1197"/>
+  </cs:dataLabel>
+  <cs:dataLabelCallout>
+    <cs:lnRef idx="0"/>
+    <cs:fillRef idx="0"/>
+    <cs:effectRef idx="0"/>
+    <cs:fontRef idx="minor">
+      <a:schemeClr val="dk1">
+        <a:lumMod val="65000"/>
+        <a:lumOff val="35000"/>
+      </a:schemeClr>
+    </cs:fontRef>
+    <cs:spPr>
+      <a:solidFill>
+        <a:schemeClr val="lt1"/>
+      </a:solidFill>
+      <a:ln>
+        <a:solidFill>
+          <a:schemeClr val="dk1">
+            <a:lumMod val="25000"/>
+            <a:lumOff val="75000"/>
+          </a:schemeClr>
+        </a:solidFill>
+      </a:ln>
+    </cs:spPr>
+    <cs:defRPr sz="1197"/>
+    <cs:bodyPr rot="0" spcFirstLastPara="1" vertOverflow="clip" horzOverflow="clip" vert="horz" wrap="square" lIns="36576" tIns="18288" rIns="36576" bIns="18288" anchor="ctr" anchorCtr="1">
+      <a:spAutoFit/>
+    </cs:bodyPr>
+  </cs:dataLabelCallout>
+  <cs:dataPoint>
+    <cs:lnRef idx="0"/>
+    <cs:fillRef idx="0">
+      <cs:styleClr val="auto"/>
+    </cs:fillRef>
+    <cs:effectRef idx="0"/>
+    <cs:fontRef idx="minor">
+      <a:schemeClr val="tx1"/>
+    </cs:fontRef>
+    <cs:spPr>
+      <a:solidFill>
+        <a:schemeClr val="phClr"/>
+      </a:solidFill>
+    </cs:spPr>
+  </cs:dataPoint>
+  <cs:dataPoint3D>
+    <cs:lnRef idx="0"/>
+    <cs:fillRef idx="0">
+      <cs:styleClr val="auto"/>
+    </cs:fillRef>
+    <cs:effectRef idx="0"/>
+    <cs:fontRef idx="minor">
+      <a:schemeClr val="tx1"/>
+    </cs:fontRef>
+    <cs:spPr>
+      <a:solidFill>
+        <a:schemeClr val="phClr"/>
+      </a:solidFill>
+    </cs:spPr>
+  </cs:dataPoint3D>
+  <cs:dataPointLine>
+    <cs:lnRef idx="0">
+      <cs:styleClr val="auto"/>
+    </cs:lnRef>
+    <cs:fillRef idx="0"/>
+    <cs:effectRef idx="0"/>
+    <cs:fontRef idx="minor">
+      <a:schemeClr val="tx1"/>
+    </cs:fontRef>
+    <cs:spPr>
+      <a:ln w="28575" cap="rnd">
+        <a:solidFill>
+          <a:schemeClr val="phClr"/>
+        </a:solidFill>
+        <a:round/>
+      </a:ln>
+    </cs:spPr>
+  </cs:dataPointLine>
+  <cs:dataPointMarker>
+    <cs:lnRef idx="0"/>
+    <cs:fillRef idx="0">
+      <cs:styleClr val="auto"/>
+    </cs:fillRef>
+    <cs:effectRef idx="0"/>
+    <cs:fontRef idx="minor">
+      <a:schemeClr val="tx1"/>
+    </cs:fontRef>
+    <cs:spPr>
+      <a:solidFill>
+        <a:schemeClr val="phClr"/>
+      </a:solidFill>
+      <a:ln w="9525">
+        <a:solidFill>
+          <a:schemeClr val="lt1"/>
+        </a:solidFill>
+      </a:ln>
+    </cs:spPr>
+  </cs:dataPointMarker>
+  <cs:dataPointMarkerLayout symbol="circle" size="5"/>
+  <cs:dataPointWireframe>
+    <cs:lnRef idx="0">
+      <cs:styleClr val="auto"/>
+    </cs:lnRef>
+    <cs:fillRef idx="0"/>
+    <cs:effectRef idx="0"/>
+    <cs:fontRef idx="minor">
+      <a:schemeClr val="tx1"/>
+    </cs:fontRef>
+    <cs:spPr>
+      <a:ln w="28575" cap="rnd">
+        <a:solidFill>
+          <a:schemeClr val="phClr"/>
+        </a:solidFill>
+        <a:round/>
+      </a:ln>
+    </cs:spPr>
+  </cs:dataPointWireframe>
+  <cs:dataTable>
+    <cs:lnRef idx="0"/>
+    <cs:fillRef idx="0"/>
+    <cs:effectRef idx="0"/>
+    <cs:fontRef idx="minor">
+      <a:schemeClr val="tx1">
+        <a:lumMod val="65000"/>
+        <a:lumOff val="35000"/>
+      </a:schemeClr>
+    </cs:fontRef>
+    <cs:spPr>
+      <a:ln w="9525">
+        <a:solidFill>
+          <a:schemeClr val="tx1">
+            <a:lumMod val="15000"/>
+            <a:lumOff val="85000"/>
+          </a:schemeClr>
+        </a:solidFill>
+      </a:ln>
+    </cs:spPr>
+    <cs:defRPr sz="1197"/>
+  </cs:dataTable>
+  <cs:downBar>
+    <cs:lnRef idx="0"/>
+    <cs:fillRef idx="0"/>
+    <cs:effectRef idx="0"/>
+    <cs:fontRef idx="minor">
+      <a:schemeClr val="dk1"/>
+    </cs:fontRef>
+    <cs:spPr>
+      <a:solidFill>
+        <a:schemeClr val="dk1">
+          <a:lumMod val="65000"/>
+          <a:lumOff val="35000"/>
+        </a:schemeClr>
+      </a:solidFill>
+      <a:ln w="9525">
+        <a:solidFill>
+          <a:schemeClr val="tx1">
+            <a:lumMod val="65000"/>
+            <a:lumOff val="35000"/>
+          </a:schemeClr>
+        </a:solidFill>
+      </a:ln>
+    </cs:spPr>
+  </cs:downBar>
+  <cs:dropLine>
+    <cs:lnRef idx="0"/>
+    <cs:fillRef idx="0"/>
+    <cs:effectRef idx="0"/>
+    <cs:fontRef idx="minor">
+      <a:schemeClr val="tx1"/>
+    </cs:fontRef>
+    <cs:spPr>
+      <a:ln w="9525" cap="flat" cmpd="sng" algn="ctr">
+        <a:solidFill>
+          <a:schemeClr val="tx1">
+            <a:lumMod val="35000"/>
+            <a:lumOff val="65000"/>
+          </a:schemeClr>
+        </a:solidFill>
+        <a:round/>
+      </a:ln>
+    </cs:spPr>
+  </cs:dropLine>
+  <cs:errorBar>
+    <cs:lnRef idx="0"/>
+    <cs:fillRef idx="0"/>
+    <cs:effectRef idx="0"/>
+    <cs:fontRef idx="minor">
+      <a:schemeClr val="tx1"/>
+    </cs:fontRef>
+    <cs:spPr>
+      <a:ln w="9525" cap="flat" cmpd="sng" algn="ctr">
+        <a:solidFill>
+          <a:schemeClr val="tx1">
+            <a:lumMod val="65000"/>
+            <a:lumOff val="35000"/>
+          </a:schemeClr>
+        </a:solidFill>
+        <a:round/>
+      </a:ln>
+    </cs:spPr>
+  </cs:errorBar>
+  <cs:floor>
+    <cs:lnRef idx="0"/>
+    <cs:fillRef idx="0"/>
+    <cs:effectRef idx="0"/>
+    <cs:fontRef idx="minor">
+      <a:schemeClr val="tx1"/>
+    </cs:fontRef>
+  </cs:floor>
+  <cs:gridlineMajor>
+    <cs:lnRef idx="0"/>
+    <cs:fillRef idx="0"/>
+    <cs:effectRef idx="0"/>
+    <cs:fontRef idx="minor">
+      <a:schemeClr val="tx1"/>
+    </cs:fontRef>
+    <cs:spPr>
+      <a:ln w="9525" cap="flat" cmpd="sng" algn="ctr">
+        <a:solidFill>
+          <a:schemeClr val="tx1">
+            <a:lumMod val="15000"/>
+            <a:lumOff val="85000"/>
+          </a:schemeClr>
+        </a:solidFill>
+        <a:round/>
+      </a:ln>
+    </cs:spPr>
+  </cs:gridlineMajor>
+  <cs:gridlineMinor>
+    <cs:lnRef idx="0"/>
+    <cs:fillRef idx="0"/>
+    <cs:effectRef idx="0"/>
+    <cs:fontRef idx="minor">
+      <a:schemeClr val="tx1"/>
+    </cs:fontRef>
+    <cs:spPr>
+      <a:ln w="9525" cap="flat" cmpd="sng" algn="ctr">
+        <a:solidFill>
+          <a:schemeClr val="tx1">
+            <a:lumMod val="15000"/>
+            <a:lumOff val="85000"/>
+          </a:schemeClr>
+        </a:solidFill>
+        <a:round/>
+      </a:ln>
+    </cs:spPr>
+  </cs:gridlineMinor>
+  <cs:hiLoLine>
+    <cs:lnRef idx="0"/>
+    <cs:fillRef idx="0"/>
+    <cs:effectRef idx="0"/>
+    <cs:fontRef idx="minor">
+      <a:schemeClr val="tx1"/>
+    </cs:fontRef>
+    <cs:spPr>
+      <a:ln w="9525" cap="flat" cmpd="sng" algn="ctr">
+        <a:solidFill>
+          <a:schemeClr val="tx1">
+            <a:lumMod val="75000"/>
+            <a:lumOff val="25000"/>
+          </a:schemeClr>
+        </a:solidFill>
+        <a:round/>
+      </a:ln>
+    </cs:spPr>
+  </cs:hiLoLine>
+  <cs:leaderLine>
+    <cs:lnRef idx="0"/>
+    <cs:fillRef idx="0"/>
+    <cs:effectRef idx="0"/>
+    <cs:fontRef idx="minor">
+      <a:schemeClr val="tx1"/>
+    </cs:fontRef>
+    <cs:spPr>
+      <a:ln w="9525" cap="flat" cmpd="sng" algn="ctr">
+        <a:solidFill>
+          <a:schemeClr val="tx1">
+            <a:lumMod val="35000"/>
+            <a:lumOff val="65000"/>
+          </a:schemeClr>
+        </a:solidFill>
+        <a:round/>
+      </a:ln>
+    </cs:spPr>
+  </cs:leaderLine>
+  <cs:legend>
+    <cs:lnRef idx="0"/>
+    <cs:fillRef idx="0"/>
+    <cs:effectRef idx="0"/>
+    <cs:fontRef idx="minor">
+      <a:schemeClr val="tx1">
+        <a:lumMod val="65000"/>
+        <a:lumOff val="35000"/>
+      </a:schemeClr>
+    </cs:fontRef>
+    <cs:defRPr sz="1197"/>
+  </cs:legend>
+  <cs:plotArea mods="allowNoFillOverride allowNoLineOverride">
+    <cs:lnRef idx="0"/>
+    <cs:fillRef idx="0"/>
+    <cs:effectRef idx="0"/>
+    <cs:fontRef idx="minor">
+      <a:schemeClr val="tx1"/>
+    </cs:fontRef>
+  </cs:plotArea>
+  <cs:plotArea3D mods="allowNoFillOverride allowNoLineOverride">
+    <cs:lnRef idx="0"/>
+    <cs:fillRef idx="0"/>
+    <cs:effectRef idx="0"/>
+    <cs:fontRef idx="minor">
+      <a:schemeClr val="tx1"/>
+    </cs:fontRef>
+  </cs:plotArea3D>
+  <cs:seriesAxis>
+    <cs:lnRef idx="0"/>
+    <cs:fillRef idx="0"/>
+    <cs:effectRef idx="0"/>
+    <cs:fontRef idx="minor">
+      <a:schemeClr val="tx1">
+        <a:lumMod val="65000"/>
+        <a:lumOff val="35000"/>
+      </a:schemeClr>
+    </cs:fontRef>
+    <cs:spPr>
+      <a:ln w="9525" cap="flat" cmpd="sng" algn="ctr">
+        <a:solidFill>
+          <a:schemeClr val="tx1">
+            <a:lumMod val="15000"/>
+            <a:lumOff val="85000"/>
+          </a:schemeClr>
+        </a:solidFill>
+        <a:round/>
+      </a:ln>
+    </cs:spPr>
+    <cs:defRPr sz="1197"/>
+  </cs:seriesAxis>
+  <cs:seriesLine>
+    <cs:lnRef idx="0"/>
+    <cs:fillRef idx="0"/>
+    <cs:effectRef idx="0"/>
+    <cs:fontRef idx="minor">
+      <a:schemeClr val="tx1"/>
+    </cs:fontRef>
+    <cs:spPr>
+      <a:ln w="9525" cap="flat">
+        <a:solidFill>
+          <a:srgbClr val="D9D9D9"/>
+        </a:solidFill>
+        <a:round/>
+      </a:ln>
+    </cs:spPr>
+  </cs:seriesLine>
+  <cs:title>
+    <cs:lnRef idx="0"/>
+    <cs:fillRef idx="0"/>
+    <cs:effectRef idx="0"/>
+    <cs:fontRef idx="minor">
+      <a:schemeClr val="tx1">
+        <a:lumMod val="65000"/>
+        <a:lumOff val="35000"/>
+      </a:schemeClr>
+    </cs:fontRef>
+    <cs:defRPr sz="1862"/>
+  </cs:title>
+  <cs:trendline>
+    <cs:lnRef idx="0">
+      <cs:styleClr val="auto"/>
+    </cs:lnRef>
+    <cs:fillRef idx="0"/>
+    <cs:effectRef idx="0"/>
+    <cs:fontRef idx="minor">
+      <a:schemeClr val="tx1"/>
+    </cs:fontRef>
+    <cs:spPr>
+      <a:ln w="19050" cap="rnd">
+        <a:solidFill>
+          <a:schemeClr val="phClr"/>
+        </a:solidFill>
+        <a:prstDash val="sysDash"/>
+      </a:ln>
+    </cs:spPr>
+  </cs:trendline>
+  <cs:trendlineLabel>
+    <cs:lnRef idx="0"/>
+    <cs:fillRef idx="0"/>
+    <cs:effectRef idx="0"/>
+    <cs:fontRef idx="minor">
+      <a:schemeClr val="tx1">
+        <a:lumMod val="65000"/>
+        <a:lumOff val="35000"/>
+      </a:schemeClr>
+    </cs:fontRef>
+    <cs:defRPr sz="1197"/>
+  </cs:trendlineLabel>
+  <cs:upBar>
+    <cs:lnRef idx="0"/>
+    <cs:fillRef idx="0"/>
+    <cs:effectRef idx="0"/>
+    <cs:fontRef idx="minor">
+      <a:schemeClr val="dk1"/>
+    </cs:fontRef>
+    <cs:spPr>
+      <a:solidFill>
+        <a:schemeClr val="lt1"/>
+      </a:solidFill>
+      <a:ln w="9525">
+        <a:solidFill>
+          <a:schemeClr val="tx1">
+            <a:lumMod val="15000"/>
+            <a:lumOff val="85000"/>
+          </a:schemeClr>
+        </a:solidFill>
+      </a:ln>
+    </cs:spPr>
+  </cs:upBar>
+  <cs:valueAxis>
+    <cs:lnRef idx="0"/>
+    <cs:fillRef idx="0"/>
+    <cs:effectRef idx="0"/>
+    <cs:fontRef idx="minor">
+      <a:schemeClr val="tx1">
+        <a:lumMod val="65000"/>
+        <a:lumOff val="35000"/>
+      </a:schemeClr>
+    </cs:fontRef>
+    <cs:defRPr sz="1197"/>
+  </cs:valueAxis>
+  <cs:wall>
+    <cs:lnRef idx="0"/>
+    <cs:fillRef idx="0"/>
+    <cs:effectRef idx="0"/>
+    <cs:fontRef idx="minor">
+      <a:schemeClr val="tx1"/>
+    </cs:fontRef>
+  </cs:wall>
+</cs:chartStyle>
+</file>
+
+<file path=ppt/charts/style19.xml><?xml version="1.0" encoding="utf-8"?>
+<cs:chartStyle xmlns:cs="http://schemas.microsoft.com/office/drawing/2012/chartStyle" xmlns:a="http://schemas.openxmlformats.org/drawingml/2006/main" id="419">
+  <cs:axisTitle>
+    <cs:lnRef idx="0"/>
+    <cs:fillRef idx="0"/>
+    <cs:effectRef idx="0"/>
+    <cs:fontRef idx="minor">
+      <a:schemeClr val="tx1">
+        <a:lumMod val="65000"/>
+        <a:lumOff val="35000"/>
+      </a:schemeClr>
+    </cs:fontRef>
+    <cs:defRPr sz="1197"/>
+  </cs:axisTitle>
+  <cs:categoryAxis>
+    <cs:lnRef idx="0"/>
+    <cs:fillRef idx="0"/>
+    <cs:effectRef idx="0"/>
+    <cs:fontRef idx="minor">
+      <a:schemeClr val="tx1">
+        <a:lumMod val="65000"/>
+        <a:lumOff val="35000"/>
+      </a:schemeClr>
+    </cs:fontRef>
+    <cs:spPr>
+      <a:ln w="9525" cap="flat" cmpd="sng" algn="ctr">
+        <a:solidFill>
+          <a:schemeClr val="tx1">
+            <a:lumMod val="15000"/>
+            <a:lumOff val="85000"/>
+          </a:schemeClr>
+        </a:solidFill>
+        <a:round/>
+      </a:ln>
+    </cs:spPr>
+    <cs:defRPr sz="1197"/>
+  </cs:categoryAxis>
+  <cs:chartArea mods="allowNoFillOverride allowNoLineOverride">
+    <cs:lnRef idx="0"/>
+    <cs:fillRef idx="0"/>
+    <cs:effectRef idx="0"/>
+    <cs:fontRef idx="minor">
+      <a:schemeClr val="tx1"/>
+    </cs:fontRef>
+    <cs:spPr>
+      <a:solidFill>
+        <a:schemeClr val="bg1"/>
+      </a:solidFill>
+      <a:ln w="9525" cap="flat" cmpd="sng" algn="ctr">
+        <a:solidFill>
+          <a:schemeClr val="tx1">
+            <a:lumMod val="15000"/>
+            <a:lumOff val="85000"/>
+          </a:schemeClr>
+        </a:solidFill>
+        <a:round/>
+      </a:ln>
+    </cs:spPr>
+    <cs:defRPr sz="1330"/>
+  </cs:chartArea>
+  <cs:dataLabel>
+    <cs:lnRef idx="0"/>
+    <cs:fillRef idx="0"/>
+    <cs:effectRef idx="0"/>
+    <cs:fontRef idx="minor">
+      <a:schemeClr val="tx1">
+        <a:lumMod val="65000"/>
+        <a:lumOff val="35000"/>
+      </a:schemeClr>
+    </cs:fontRef>
+    <cs:defRPr sz="1197"/>
+  </cs:dataLabel>
+  <cs:dataLabelCallout>
+    <cs:lnRef idx="0"/>
+    <cs:fillRef idx="0"/>
+    <cs:effectRef idx="0"/>
+    <cs:fontRef idx="minor">
+      <a:schemeClr val="dk1">
+        <a:lumMod val="65000"/>
+        <a:lumOff val="35000"/>
+      </a:schemeClr>
+    </cs:fontRef>
+    <cs:spPr>
+      <a:solidFill>
+        <a:schemeClr val="lt1"/>
+      </a:solidFill>
+      <a:ln>
+        <a:solidFill>
+          <a:schemeClr val="dk1">
+            <a:lumMod val="25000"/>
+            <a:lumOff val="75000"/>
+          </a:schemeClr>
+        </a:solidFill>
+      </a:ln>
+    </cs:spPr>
+    <cs:defRPr sz="1197"/>
+    <cs:bodyPr rot="0" spcFirstLastPara="1" vertOverflow="clip" horzOverflow="clip" vert="horz" wrap="square" lIns="36576" tIns="18288" rIns="36576" bIns="18288" anchor="ctr" anchorCtr="1">
+      <a:spAutoFit/>
+    </cs:bodyPr>
+  </cs:dataLabelCallout>
+  <cs:dataPoint>
+    <cs:lnRef idx="0"/>
+    <cs:fillRef idx="0">
+      <cs:styleClr val="auto"/>
+    </cs:fillRef>
+    <cs:effectRef idx="0"/>
+    <cs:fontRef idx="minor">
+      <a:schemeClr val="tx1"/>
+    </cs:fontRef>
+    <cs:spPr>
+      <a:solidFill>
+        <a:schemeClr val="phClr"/>
+      </a:solidFill>
+    </cs:spPr>
+  </cs:dataPoint>
+  <cs:dataPoint3D>
+    <cs:lnRef idx="0"/>
+    <cs:fillRef idx="0">
+      <cs:styleClr val="auto"/>
+    </cs:fillRef>
+    <cs:effectRef idx="0"/>
+    <cs:fontRef idx="minor">
+      <a:schemeClr val="tx1"/>
+    </cs:fontRef>
+    <cs:spPr>
+      <a:solidFill>
+        <a:schemeClr val="phClr"/>
+      </a:solidFill>
+    </cs:spPr>
+  </cs:dataPoint3D>
+  <cs:dataPointLine>
+    <cs:lnRef idx="0">
+      <cs:styleClr val="auto"/>
+    </cs:lnRef>
+    <cs:fillRef idx="0"/>
+    <cs:effectRef idx="0"/>
+    <cs:fontRef idx="minor">
+      <a:schemeClr val="tx1"/>
+    </cs:fontRef>
+    <cs:spPr>
+      <a:ln w="28575" cap="rnd">
+        <a:solidFill>
+          <a:schemeClr val="phClr"/>
+        </a:solidFill>
+        <a:round/>
+      </a:ln>
+    </cs:spPr>
+  </cs:dataPointLine>
+  <cs:dataPointMarker>
+    <cs:lnRef idx="0"/>
+    <cs:fillRef idx="0">
+      <cs:styleClr val="auto"/>
+    </cs:fillRef>
+    <cs:effectRef idx="0"/>
+    <cs:fontRef idx="minor">
+      <a:schemeClr val="tx1"/>
+    </cs:fontRef>
+    <cs:spPr>
+      <a:solidFill>
+        <a:schemeClr val="phClr"/>
+      </a:solidFill>
+      <a:ln w="9525">
+        <a:solidFill>
+          <a:schemeClr val="lt1"/>
+        </a:solidFill>
+      </a:ln>
+    </cs:spPr>
+  </cs:dataPointMarker>
+  <cs:dataPointMarkerLayout symbol="circle" size="5"/>
+  <cs:dataPointWireframe>
+    <cs:lnRef idx="0">
+      <cs:styleClr val="auto"/>
+    </cs:lnRef>
+    <cs:fillRef idx="0"/>
+    <cs:effectRef idx="0"/>
+    <cs:fontRef idx="minor">
+      <a:schemeClr val="tx1"/>
+    </cs:fontRef>
+    <cs:spPr>
+      <a:ln w="28575" cap="rnd">
+        <a:solidFill>
+          <a:schemeClr val="phClr"/>
+        </a:solidFill>
+        <a:round/>
+      </a:ln>
+    </cs:spPr>
+  </cs:dataPointWireframe>
+  <cs:dataTable>
+    <cs:lnRef idx="0"/>
+    <cs:fillRef idx="0"/>
+    <cs:effectRef idx="0"/>
+    <cs:fontRef idx="minor">
+      <a:schemeClr val="tx1">
+        <a:lumMod val="65000"/>
+        <a:lumOff val="35000"/>
+      </a:schemeClr>
+    </cs:fontRef>
+    <cs:spPr>
+      <a:ln w="9525">
+        <a:solidFill>
+          <a:schemeClr val="tx1">
+            <a:lumMod val="15000"/>
+            <a:lumOff val="85000"/>
+          </a:schemeClr>
+        </a:solidFill>
+      </a:ln>
+    </cs:spPr>
+    <cs:defRPr sz="1197"/>
+  </cs:dataTable>
+  <cs:downBar>
+    <cs:lnRef idx="0"/>
+    <cs:fillRef idx="0"/>
+    <cs:effectRef idx="0"/>
+    <cs:fontRef idx="minor">
+      <a:schemeClr val="dk1"/>
+    </cs:fontRef>
+    <cs:spPr>
+      <a:solidFill>
+        <a:schemeClr val="dk1">
+          <a:lumMod val="65000"/>
+          <a:lumOff val="35000"/>
+        </a:schemeClr>
+      </a:solidFill>
+      <a:ln w="9525">
+        <a:solidFill>
+          <a:schemeClr val="tx1">
+            <a:lumMod val="65000"/>
+            <a:lumOff val="35000"/>
+          </a:schemeClr>
+        </a:solidFill>
+      </a:ln>
+    </cs:spPr>
+  </cs:downBar>
+  <cs:dropLine>
+    <cs:lnRef idx="0"/>
+    <cs:fillRef idx="0"/>
+    <cs:effectRef idx="0"/>
+    <cs:fontRef idx="minor">
+      <a:schemeClr val="tx1"/>
+    </cs:fontRef>
+    <cs:spPr>
+      <a:ln w="9525" cap="flat" cmpd="sng" algn="ctr">
+        <a:solidFill>
+          <a:schemeClr val="tx1">
+            <a:lumMod val="35000"/>
+            <a:lumOff val="65000"/>
+          </a:schemeClr>
+        </a:solidFill>
+        <a:round/>
+      </a:ln>
+    </cs:spPr>
+  </cs:dropLine>
+  <cs:errorBar>
+    <cs:lnRef idx="0"/>
+    <cs:fillRef idx="0"/>
+    <cs:effectRef idx="0"/>
+    <cs:fontRef idx="minor">
+      <a:schemeClr val="tx1"/>
+    </cs:fontRef>
+    <cs:spPr>
+      <a:ln w="9525" cap="flat" cmpd="sng" algn="ctr">
+        <a:solidFill>
+          <a:schemeClr val="tx1">
+            <a:lumMod val="65000"/>
+            <a:lumOff val="35000"/>
+          </a:schemeClr>
+        </a:solidFill>
+        <a:round/>
+      </a:ln>
+    </cs:spPr>
+  </cs:errorBar>
+  <cs:floor>
+    <cs:lnRef idx="0"/>
+    <cs:fillRef idx="0"/>
+    <cs:effectRef idx="0"/>
+    <cs:fontRef idx="minor">
+      <a:schemeClr val="tx1"/>
+    </cs:fontRef>
+  </cs:floor>
+  <cs:gridlineMajor>
+    <cs:lnRef idx="0"/>
+    <cs:fillRef idx="0"/>
+    <cs:effectRef idx="0"/>
+    <cs:fontRef idx="minor">
+      <a:schemeClr val="tx1"/>
+    </cs:fontRef>
+    <cs:spPr>
+      <a:ln w="9525" cap="flat" cmpd="sng" algn="ctr">
+        <a:solidFill>
+          <a:schemeClr val="tx1">
+            <a:lumMod val="15000"/>
+            <a:lumOff val="85000"/>
+          </a:schemeClr>
+        </a:solidFill>
+        <a:round/>
+      </a:ln>
+    </cs:spPr>
+  </cs:gridlineMajor>
+  <cs:gridlineMinor>
+    <cs:lnRef idx="0"/>
+    <cs:fillRef idx="0"/>
+    <cs:effectRef idx="0"/>
+    <cs:fontRef idx="minor">
+      <a:schemeClr val="tx1"/>
+    </cs:fontRef>
+    <cs:spPr>
+      <a:ln w="9525" cap="flat" cmpd="sng" algn="ctr">
+        <a:solidFill>
+          <a:schemeClr val="tx1">
+            <a:lumMod val="15000"/>
+            <a:lumOff val="85000"/>
+          </a:schemeClr>
+        </a:solidFill>
+        <a:round/>
+      </a:ln>
+    </cs:spPr>
+  </cs:gridlineMinor>
+  <cs:hiLoLine>
+    <cs:lnRef idx="0"/>
+    <cs:fillRef idx="0"/>
+    <cs:effectRef idx="0"/>
+    <cs:fontRef idx="minor">
+      <a:schemeClr val="tx1"/>
+    </cs:fontRef>
+    <cs:spPr>
+      <a:ln w="9525" cap="flat" cmpd="sng" algn="ctr">
+        <a:solidFill>
+          <a:schemeClr val="tx1">
+            <a:lumMod val="75000"/>
+            <a:lumOff val="25000"/>
+          </a:schemeClr>
+        </a:solidFill>
+        <a:round/>
+      </a:ln>
+    </cs:spPr>
+  </cs:hiLoLine>
+  <cs:leaderLine>
+    <cs:lnRef idx="0"/>
+    <cs:fillRef idx="0"/>
+    <cs:effectRef idx="0"/>
+    <cs:fontRef idx="minor">
+      <a:schemeClr val="tx1"/>
+    </cs:fontRef>
+    <cs:spPr>
+      <a:ln w="9525" cap="flat" cmpd="sng" algn="ctr">
+        <a:solidFill>
+          <a:schemeClr val="tx1">
+            <a:lumMod val="35000"/>
+            <a:lumOff val="65000"/>
+          </a:schemeClr>
+        </a:solidFill>
+        <a:round/>
+      </a:ln>
+    </cs:spPr>
+  </cs:leaderLine>
+  <cs:legend>
+    <cs:lnRef idx="0"/>
+    <cs:fillRef idx="0"/>
+    <cs:effectRef idx="0"/>
+    <cs:fontRef idx="minor">
+      <a:schemeClr val="tx1">
+        <a:lumMod val="65000"/>
+        <a:lumOff val="35000"/>
+      </a:schemeClr>
+    </cs:fontRef>
+    <cs:defRPr sz="1197"/>
+  </cs:legend>
+  <cs:plotArea mods="allowNoFillOverride allowNoLineOverride">
+    <cs:lnRef idx="0"/>
+    <cs:fillRef idx="0"/>
+    <cs:effectRef idx="0"/>
+    <cs:fontRef idx="minor">
+      <a:schemeClr val="tx1"/>
+    </cs:fontRef>
+  </cs:plotArea>
+  <cs:plotArea3D mods="allowNoFillOverride allowNoLineOverride">
+    <cs:lnRef idx="0"/>
+    <cs:fillRef idx="0"/>
+    <cs:effectRef idx="0"/>
+    <cs:fontRef idx="minor">
+      <a:schemeClr val="tx1"/>
+    </cs:fontRef>
+  </cs:plotArea3D>
+  <cs:seriesAxis>
+    <cs:lnRef idx="0"/>
+    <cs:fillRef idx="0"/>
+    <cs:effectRef idx="0"/>
+    <cs:fontRef idx="minor">
+      <a:schemeClr val="tx1">
+        <a:lumMod val="65000"/>
+        <a:lumOff val="35000"/>
+      </a:schemeClr>
+    </cs:fontRef>
+    <cs:spPr>
+      <a:ln w="9525" cap="flat" cmpd="sng" algn="ctr">
+        <a:solidFill>
+          <a:schemeClr val="tx1">
+            <a:lumMod val="15000"/>
+            <a:lumOff val="85000"/>
+          </a:schemeClr>
+        </a:solidFill>
+        <a:round/>
+      </a:ln>
+    </cs:spPr>
+    <cs:defRPr sz="1197"/>
+  </cs:seriesAxis>
+  <cs:seriesLine>
+    <cs:lnRef idx="0"/>
+    <cs:fillRef idx="0"/>
+    <cs:effectRef idx="0"/>
+    <cs:fontRef idx="minor">
+      <a:schemeClr val="tx1"/>
+    </cs:fontRef>
+    <cs:spPr>
+      <a:ln w="9525" cap="flat">
+        <a:solidFill>
+          <a:srgbClr val="D9D9D9"/>
+        </a:solidFill>
+        <a:round/>
+      </a:ln>
+    </cs:spPr>
+  </cs:seriesLine>
+  <cs:title>
+    <cs:lnRef idx="0"/>
+    <cs:fillRef idx="0"/>
+    <cs:effectRef idx="0"/>
+    <cs:fontRef idx="minor">
+      <a:schemeClr val="tx1">
+        <a:lumMod val="65000"/>
+        <a:lumOff val="35000"/>
+      </a:schemeClr>
+    </cs:fontRef>
+    <cs:defRPr sz="1862"/>
+  </cs:title>
+  <cs:trendline>
+    <cs:lnRef idx="0">
+      <cs:styleClr val="auto"/>
+    </cs:lnRef>
+    <cs:fillRef idx="0"/>
+    <cs:effectRef idx="0"/>
+    <cs:fontRef idx="minor">
+      <a:schemeClr val="tx1"/>
+    </cs:fontRef>
+    <cs:spPr>
+      <a:ln w="19050" cap="rnd">
+        <a:solidFill>
+          <a:schemeClr val="phClr"/>
+        </a:solidFill>
+        <a:prstDash val="sysDash"/>
+      </a:ln>
+    </cs:spPr>
+  </cs:trendline>
+  <cs:trendlineLabel>
+    <cs:lnRef idx="0"/>
+    <cs:fillRef idx="0"/>
+    <cs:effectRef idx="0"/>
+    <cs:fontRef idx="minor">
+      <a:schemeClr val="tx1">
+        <a:lumMod val="65000"/>
+        <a:lumOff val="35000"/>
+      </a:schemeClr>
+    </cs:fontRef>
+    <cs:defRPr sz="1197"/>
+  </cs:trendlineLabel>
+  <cs:upBar>
+    <cs:lnRef idx="0"/>
+    <cs:fillRef idx="0"/>
+    <cs:effectRef idx="0"/>
+    <cs:fontRef idx="minor">
+      <a:schemeClr val="dk1"/>
+    </cs:fontRef>
+    <cs:spPr>
+      <a:solidFill>
+        <a:schemeClr val="lt1"/>
+      </a:solidFill>
+      <a:ln w="9525">
+        <a:solidFill>
+          <a:schemeClr val="tx1">
+            <a:lumMod val="15000"/>
+            <a:lumOff val="85000"/>
+          </a:schemeClr>
+        </a:solidFill>
+      </a:ln>
+    </cs:spPr>
+  </cs:upBar>
+  <cs:valueAxis>
+    <cs:lnRef idx="0"/>
+    <cs:fillRef idx="0"/>
+    <cs:effectRef idx="0"/>
+    <cs:fontRef idx="minor">
+      <a:schemeClr val="tx1">
+        <a:lumMod val="65000"/>
+        <a:lumOff val="35000"/>
+      </a:schemeClr>
+    </cs:fontRef>
+    <cs:defRPr sz="1197"/>
+  </cs:valueAxis>
+  <cs:wall>
+    <cs:lnRef idx="0"/>
+    <cs:fillRef idx="0"/>
+    <cs:effectRef idx="0"/>
+    <cs:fontRef idx="minor">
+      <a:schemeClr val="tx1"/>
+    </cs:fontRef>
+  </cs:wall>
+</cs:chartStyle>
+</file>
+
+<file path=ppt/charts/style20.xml><?xml version="1.0" encoding="utf-8"?>
+<cs:chartStyle xmlns:cs="http://schemas.microsoft.com/office/drawing/2012/chartStyle" xmlns:a="http://schemas.openxmlformats.org/drawingml/2006/main" id="419">
+  <cs:axisTitle>
+    <cs:lnRef idx="0"/>
+    <cs:fillRef idx="0"/>
+    <cs:effectRef idx="0"/>
+    <cs:fontRef idx="minor">
+      <a:schemeClr val="tx1">
+        <a:lumMod val="65000"/>
+        <a:lumOff val="35000"/>
+      </a:schemeClr>
+    </cs:fontRef>
+    <cs:defRPr sz="1197"/>
+  </cs:axisTitle>
+  <cs:categoryAxis>
+    <cs:lnRef idx="0"/>
+    <cs:fillRef idx="0"/>
+    <cs:effectRef idx="0"/>
+    <cs:fontRef idx="minor">
+      <a:schemeClr val="tx1">
+        <a:lumMod val="65000"/>
+        <a:lumOff val="35000"/>
+      </a:schemeClr>
+    </cs:fontRef>
+    <cs:spPr>
+      <a:ln w="9525" cap="flat" cmpd="sng" algn="ctr">
+        <a:solidFill>
+          <a:schemeClr val="tx1">
+            <a:lumMod val="15000"/>
+            <a:lumOff val="85000"/>
+          </a:schemeClr>
+        </a:solidFill>
+        <a:round/>
+      </a:ln>
+    </cs:spPr>
+    <cs:defRPr sz="1197"/>
+  </cs:categoryAxis>
+  <cs:chartArea mods="allowNoFillOverride allowNoLineOverride">
+    <cs:lnRef idx="0"/>
+    <cs:fillRef idx="0"/>
+    <cs:effectRef idx="0"/>
+    <cs:fontRef idx="minor">
+      <a:schemeClr val="tx1"/>
+    </cs:fontRef>
+    <cs:spPr>
+      <a:solidFill>
+        <a:schemeClr val="bg1"/>
+      </a:solidFill>
+      <a:ln w="9525" cap="flat" cmpd="sng" algn="ctr">
+        <a:solidFill>
+          <a:schemeClr val="tx1">
+            <a:lumMod val="15000"/>
+            <a:lumOff val="85000"/>
+          </a:schemeClr>
+        </a:solidFill>
+        <a:round/>
+      </a:ln>
+    </cs:spPr>
+    <cs:defRPr sz="1330"/>
+  </cs:chartArea>
+  <cs:dataLabel>
+    <cs:lnRef idx="0"/>
+    <cs:fillRef idx="0"/>
+    <cs:effectRef idx="0"/>
+    <cs:fontRef idx="minor">
+      <a:schemeClr val="tx1">
+        <a:lumMod val="65000"/>
+        <a:lumOff val="35000"/>
+      </a:schemeClr>
+    </cs:fontRef>
+    <cs:defRPr sz="1197"/>
+  </cs:dataLabel>
+  <cs:dataLabelCallout>
+    <cs:lnRef idx="0"/>
+    <cs:fillRef idx="0"/>
+    <cs:effectRef idx="0"/>
+    <cs:fontRef idx="minor">
+      <a:schemeClr val="dk1">
+        <a:lumMod val="65000"/>
+        <a:lumOff val="35000"/>
+      </a:schemeClr>
+    </cs:fontRef>
+    <cs:spPr>
+      <a:solidFill>
+        <a:schemeClr val="lt1"/>
+      </a:solidFill>
+      <a:ln>
+        <a:solidFill>
+          <a:schemeClr val="dk1">
+            <a:lumMod val="25000"/>
+            <a:lumOff val="75000"/>
+          </a:schemeClr>
+        </a:solidFill>
+      </a:ln>
+    </cs:spPr>
+    <cs:defRPr sz="1197"/>
+    <cs:bodyPr rot="0" spcFirstLastPara="1" vertOverflow="clip" horzOverflow="clip" vert="horz" wrap="square" lIns="36576" tIns="18288" rIns="36576" bIns="18288" anchor="ctr" anchorCtr="1">
+      <a:spAutoFit/>
+    </cs:bodyPr>
+  </cs:dataLabelCallout>
+  <cs:dataPoint>
+    <cs:lnRef idx="0"/>
+    <cs:fillRef idx="0">
+      <cs:styleClr val="auto"/>
+    </cs:fillRef>
+    <cs:effectRef idx="0"/>
+    <cs:fontRef idx="minor">
+      <a:schemeClr val="tx1"/>
+    </cs:fontRef>
+    <cs:spPr>
+      <a:solidFill>
+        <a:schemeClr val="phClr"/>
+      </a:solidFill>
+    </cs:spPr>
+  </cs:dataPoint>
+  <cs:dataPoint3D>
+    <cs:lnRef idx="0"/>
+    <cs:fillRef idx="0">
+      <cs:styleClr val="auto"/>
+    </cs:fillRef>
+    <cs:effectRef idx="0"/>
+    <cs:fontRef idx="minor">
+      <a:schemeClr val="tx1"/>
+    </cs:fontRef>
+    <cs:spPr>
+      <a:solidFill>
+        <a:schemeClr val="phClr"/>
+      </a:solidFill>
+    </cs:spPr>
+  </cs:dataPoint3D>
+  <cs:dataPointLine>
+    <cs:lnRef idx="0">
+      <cs:styleClr val="auto"/>
+    </cs:lnRef>
+    <cs:fillRef idx="0"/>
+    <cs:effectRef idx="0"/>
+    <cs:fontRef idx="minor">
+      <a:schemeClr val="tx1"/>
+    </cs:fontRef>
+    <cs:spPr>
+      <a:ln w="28575" cap="rnd">
+        <a:solidFill>
+          <a:schemeClr val="phClr"/>
+        </a:solidFill>
+        <a:round/>
+      </a:ln>
+    </cs:spPr>
+  </cs:dataPointLine>
+  <cs:dataPointMarker>
+    <cs:lnRef idx="0"/>
+    <cs:fillRef idx="0">
+      <cs:styleClr val="auto"/>
+    </cs:fillRef>
+    <cs:effectRef idx="0"/>
+    <cs:fontRef idx="minor">
+      <a:schemeClr val="tx1"/>
+    </cs:fontRef>
+    <cs:spPr>
+      <a:solidFill>
+        <a:schemeClr val="phClr"/>
+      </a:solidFill>
+      <a:ln w="9525">
+        <a:solidFill>
+          <a:schemeClr val="lt1"/>
+        </a:solidFill>
+      </a:ln>
+    </cs:spPr>
+  </cs:dataPointMarker>
+  <cs:dataPointMarkerLayout symbol="circle" size="5"/>
+  <cs:dataPointWireframe>
+    <cs:lnRef idx="0">
+      <cs:styleClr val="auto"/>
+    </cs:lnRef>
+    <cs:fillRef idx="0"/>
+    <cs:effectRef idx="0"/>
+    <cs:fontRef idx="minor">
+      <a:schemeClr val="tx1"/>
+    </cs:fontRef>
+    <cs:spPr>
+      <a:ln w="28575" cap="rnd">
+        <a:solidFill>
+          <a:schemeClr val="phClr"/>
+        </a:solidFill>
+        <a:round/>
+      </a:ln>
+    </cs:spPr>
+  </cs:dataPointWireframe>
+  <cs:dataTable>
+    <cs:lnRef idx="0"/>
+    <cs:fillRef idx="0"/>
+    <cs:effectRef idx="0"/>
+    <cs:fontRef idx="minor">
+      <a:schemeClr val="tx1">
+        <a:lumMod val="65000"/>
+        <a:lumOff val="35000"/>
+      </a:schemeClr>
+    </cs:fontRef>
+    <cs:spPr>
+      <a:ln w="9525">
+        <a:solidFill>
+          <a:schemeClr val="tx1">
+            <a:lumMod val="15000"/>
+            <a:lumOff val="85000"/>
+          </a:schemeClr>
+        </a:solidFill>
+      </a:ln>
+    </cs:spPr>
+    <cs:defRPr sz="1197"/>
+  </cs:dataTable>
+  <cs:downBar>
+    <cs:lnRef idx="0"/>
+    <cs:fillRef idx="0"/>
+    <cs:effectRef idx="0"/>
+    <cs:fontRef idx="minor">
+      <a:schemeClr val="dk1"/>
+    </cs:fontRef>
+    <cs:spPr>
+      <a:solidFill>
+        <a:schemeClr val="dk1">
+          <a:lumMod val="65000"/>
+          <a:lumOff val="35000"/>
+        </a:schemeClr>
+      </a:solidFill>
+      <a:ln w="9525">
+        <a:solidFill>
+          <a:schemeClr val="tx1">
+            <a:lumMod val="65000"/>
+            <a:lumOff val="35000"/>
+          </a:schemeClr>
+        </a:solidFill>
+      </a:ln>
+    </cs:spPr>
+  </cs:downBar>
+  <cs:dropLine>
+    <cs:lnRef idx="0"/>
+    <cs:fillRef idx="0"/>
+    <cs:effectRef idx="0"/>
+    <cs:fontRef idx="minor">
+      <a:schemeClr val="tx1"/>
+    </cs:fontRef>
+    <cs:spPr>
+      <a:ln w="9525" cap="flat" cmpd="sng" algn="ctr">
+        <a:solidFill>
+          <a:schemeClr val="tx1">
+            <a:lumMod val="35000"/>
+            <a:lumOff val="65000"/>
+          </a:schemeClr>
+        </a:solidFill>
+        <a:round/>
+      </a:ln>
+    </cs:spPr>
+  </cs:dropLine>
+  <cs:errorBar>
+    <cs:lnRef idx="0"/>
+    <cs:fillRef idx="0"/>
+    <cs:effectRef idx="0"/>
+    <cs:fontRef idx="minor">
+      <a:schemeClr val="tx1"/>
+    </cs:fontRef>
+    <cs:spPr>
+      <a:ln w="9525" cap="flat" cmpd="sng" algn="ctr">
+        <a:solidFill>
+          <a:schemeClr val="tx1">
+            <a:lumMod val="65000"/>
+            <a:lumOff val="35000"/>
+          </a:schemeClr>
+        </a:solidFill>
+        <a:round/>
+      </a:ln>
+    </cs:spPr>
+  </cs:errorBar>
+  <cs:floor>
+    <cs:lnRef idx="0"/>
+    <cs:fillRef idx="0"/>
+    <cs:effectRef idx="0"/>
+    <cs:fontRef idx="minor">
+      <a:schemeClr val="tx1"/>
+    </cs:fontRef>
+  </cs:floor>
+  <cs:gridlineMajor>
+    <cs:lnRef idx="0"/>
+    <cs:fillRef idx="0"/>
+    <cs:effectRef idx="0"/>
+    <cs:fontRef idx="minor">
+      <a:schemeClr val="tx1"/>
+    </cs:fontRef>
+    <cs:spPr>
+      <a:ln w="9525" cap="flat" cmpd="sng" algn="ctr">
+        <a:solidFill>
+          <a:schemeClr val="tx1">
+            <a:lumMod val="15000"/>
+            <a:lumOff val="85000"/>
+          </a:schemeClr>
+        </a:solidFill>
+        <a:round/>
+      </a:ln>
+    </cs:spPr>
+  </cs:gridlineMajor>
+  <cs:gridlineMinor>
+    <cs:lnRef idx="0"/>
+    <cs:fillRef idx="0"/>
+    <cs:effectRef idx="0"/>
+    <cs:fontRef idx="minor">
+      <a:schemeClr val="tx1"/>
+    </cs:fontRef>
+    <cs:spPr>
+      <a:ln w="9525" cap="flat" cmpd="sng" algn="ctr">
+        <a:solidFill>
+          <a:schemeClr val="tx1">
+            <a:lumMod val="15000"/>
+            <a:lumOff val="85000"/>
+          </a:schemeClr>
+        </a:solidFill>
+        <a:round/>
+      </a:ln>
+    </cs:spPr>
+  </cs:gridlineMinor>
+  <cs:hiLoLine>
+    <cs:lnRef idx="0"/>
+    <cs:fillRef idx="0"/>
+    <cs:effectRef idx="0"/>
+    <cs:fontRef idx="minor">
+      <a:schemeClr val="tx1"/>
+    </cs:fontRef>
+    <cs:spPr>
+      <a:ln w="9525" cap="flat" cmpd="sng" algn="ctr">
+        <a:solidFill>
+          <a:schemeClr val="tx1">
+            <a:lumMod val="75000"/>
+            <a:lumOff val="25000"/>
+          </a:schemeClr>
+        </a:solidFill>
+        <a:round/>
+      </a:ln>
+    </cs:spPr>
+  </cs:hiLoLine>
+  <cs:leaderLine>
+    <cs:lnRef idx="0"/>
+    <cs:fillRef idx="0"/>
+    <cs:effectRef idx="0"/>
+    <cs:fontRef idx="minor">
+      <a:schemeClr val="tx1"/>
+    </cs:fontRef>
+    <cs:spPr>
+      <a:ln w="9525" cap="flat" cmpd="sng" algn="ctr">
+        <a:solidFill>
+          <a:schemeClr val="tx1">
+            <a:lumMod val="35000"/>
+            <a:lumOff val="65000"/>
+          </a:schemeClr>
+        </a:solidFill>
+        <a:round/>
+      </a:ln>
+    </cs:spPr>
+  </cs:leaderLine>
+  <cs:legend>
+    <cs:lnRef idx="0"/>
+    <cs:fillRef idx="0"/>
+    <cs:effectRef idx="0"/>
+    <cs:fontRef idx="minor">
+      <a:schemeClr val="tx1">
+        <a:lumMod val="65000"/>
+        <a:lumOff val="35000"/>
+      </a:schemeClr>
+    </cs:fontRef>
+    <cs:defRPr sz="1197"/>
+  </cs:legend>
+  <cs:plotArea mods="allowNoFillOverride allowNoLineOverride">
+    <cs:lnRef idx="0"/>
+    <cs:fillRef idx="0"/>
+    <cs:effectRef idx="0"/>
+    <cs:fontRef idx="minor">
+      <a:schemeClr val="tx1"/>
+    </cs:fontRef>
+  </cs:plotArea>
+  <cs:plotArea3D mods="allowNoFillOverride allowNoLineOverride">
+    <cs:lnRef idx="0"/>
+    <cs:fillRef idx="0"/>
+    <cs:effectRef idx="0"/>
+    <cs:fontRef idx="minor">
+      <a:schemeClr val="tx1"/>
+    </cs:fontRef>
+  </cs:plotArea3D>
+  <cs:seriesAxis>
+    <cs:lnRef idx="0"/>
+    <cs:fillRef idx="0"/>
+    <cs:effectRef idx="0"/>
+    <cs:fontRef idx="minor">
+      <a:schemeClr val="tx1">
+        <a:lumMod val="65000"/>
+        <a:lumOff val="35000"/>
+      </a:schemeClr>
+    </cs:fontRef>
+    <cs:spPr>
+      <a:ln w="9525" cap="flat" cmpd="sng" algn="ctr">
+        <a:solidFill>
+          <a:schemeClr val="tx1">
+            <a:lumMod val="15000"/>
+            <a:lumOff val="85000"/>
+          </a:schemeClr>
+        </a:solidFill>
+        <a:round/>
+      </a:ln>
+    </cs:spPr>
+    <cs:defRPr sz="1197"/>
+  </cs:seriesAxis>
+  <cs:seriesLine>
+    <cs:lnRef idx="0"/>
+    <cs:fillRef idx="0"/>
+    <cs:effectRef idx="0"/>
+    <cs:fontRef idx="minor">
+      <a:schemeClr val="tx1"/>
+    </cs:fontRef>
+    <cs:spPr>
+      <a:ln w="9525" cap="flat">
+        <a:solidFill>
+          <a:srgbClr val="D9D9D9"/>
+        </a:solidFill>
+        <a:round/>
+      </a:ln>
+    </cs:spPr>
+  </cs:seriesLine>
+  <cs:title>
+    <cs:lnRef idx="0"/>
+    <cs:fillRef idx="0"/>
+    <cs:effectRef idx="0"/>
+    <cs:fontRef idx="minor">
+      <a:schemeClr val="tx1">
+        <a:lumMod val="65000"/>
+        <a:lumOff val="35000"/>
+      </a:schemeClr>
+    </cs:fontRef>
+    <cs:defRPr sz="1862"/>
+  </cs:title>
+  <cs:trendline>
+    <cs:lnRef idx="0">
+      <cs:styleClr val="auto"/>
+    </cs:lnRef>
+    <cs:fillRef idx="0"/>
+    <cs:effectRef idx="0"/>
+    <cs:fontRef idx="minor">
+      <a:schemeClr val="tx1"/>
+    </cs:fontRef>
+    <cs:spPr>
+      <a:ln w="19050" cap="rnd">
+        <a:solidFill>
+          <a:schemeClr val="phClr"/>
+        </a:solidFill>
+        <a:prstDash val="sysDash"/>
+      </a:ln>
+    </cs:spPr>
+  </cs:trendline>
+  <cs:trendlineLabel>
+    <cs:lnRef idx="0"/>
+    <cs:fillRef idx="0"/>
+    <cs:effectRef idx="0"/>
+    <cs:fontRef idx="minor">
+      <a:schemeClr val="tx1">
+        <a:lumMod val="65000"/>
+        <a:lumOff val="35000"/>
+      </a:schemeClr>
+    </cs:fontRef>
+    <cs:defRPr sz="1197"/>
+  </cs:trendlineLabel>
+  <cs:upBar>
+    <cs:lnRef idx="0"/>
+    <cs:fillRef idx="0"/>
+    <cs:effectRef idx="0"/>
+    <cs:fontRef idx="minor">
+      <a:schemeClr val="dk1"/>
+    </cs:fontRef>
+    <cs:spPr>
+      <a:solidFill>
+        <a:schemeClr val="lt1"/>
+      </a:solidFill>
+      <a:ln w="9525">
+        <a:solidFill>
+          <a:schemeClr val="tx1">
+            <a:lumMod val="15000"/>
+            <a:lumOff val="85000"/>
+          </a:schemeClr>
+        </a:solidFill>
+      </a:ln>
+    </cs:spPr>
+  </cs:upBar>
+  <cs:valueAxis>
+    <cs:lnRef idx="0"/>
+    <cs:fillRef idx="0"/>
+    <cs:effectRef idx="0"/>
+    <cs:fontRef idx="minor">
+      <a:schemeClr val="tx1">
+        <a:lumMod val="65000"/>
+        <a:lumOff val="35000"/>
+      </a:schemeClr>
+    </cs:fontRef>
+    <cs:defRPr sz="1197"/>
+  </cs:valueAxis>
+  <cs:wall>
+    <cs:lnRef idx="0"/>
+    <cs:fillRef idx="0"/>
+    <cs:effectRef idx="0"/>
+    <cs:fontRef idx="minor">
+      <a:schemeClr val="tx1"/>
+    </cs:fontRef>
+  </cs:wall>
+</cs:chartStyle>
 </file>
 
 <file path=ppt/slideLayouts/slideLayout1.xml><?xml version="1.0" encoding="utf-8"?>

--- a/e2e/pptx/fixtures/chart-gallery.pptx
+++ b/e2e/pptx/fixtures/chart-gallery.pptx
@@ -7067,6 +7067,126 @@
           <a:chExt cx="0" cy="0"/>
         </a:xfrm>
       </p:grpSpPr>
+      <p:sp>
+        <p:nvSpPr>
+          <p:cNvPr id="2" name="CtrTitle Placeholder 1"/>
+          <p:cNvSpPr>
+            <a:spLocks noGrp="1"/>
+          </p:cNvSpPr>
+          <p:nvPr>
+            <p:ph type="ctrTitle" idx="0"/>
+          </p:nvPr>
+        </p:nvSpPr>
+        <p:spPr>
+          <a:xfrm>
+            <a:off x="975360" y="1645920"/>
+            <a:ext cx="10241280" cy="1508760"/>
+          </a:xfrm>
+        </p:spPr>
+        <p:txBody>
+          <a:bodyPr/>
+          <a:lstStyle/>
+          <a:p>
+            <a:endParaRPr lang="en-US"/>
+          </a:p>
+        </p:txBody>
+      </p:sp>
+      <p:sp>
+        <p:nvSpPr>
+          <p:cNvPr id="3" name="SubTitle Placeholder 2"/>
+          <p:cNvSpPr>
+            <a:spLocks noGrp="1"/>
+          </p:cNvSpPr>
+          <p:nvPr>
+            <p:ph type="subTitle" idx="1"/>
+          </p:nvPr>
+        </p:nvSpPr>
+        <p:spPr>
+          <a:xfrm>
+            <a:off x="1463040" y="3360420"/>
+            <a:ext cx="9265920" cy="1371600"/>
+          </a:xfrm>
+        </p:spPr>
+        <p:txBody>
+          <a:bodyPr/>
+          <a:lstStyle/>
+          <a:p>
+            <a:endParaRPr lang="en-US"/>
+          </a:p>
+        </p:txBody>
+      </p:sp>
+      <p:sp>
+        <p:nvSpPr>
+          <p:cNvPr id="4" name="Dt Placeholder 3"/>
+          <p:cNvSpPr>
+            <a:spLocks noGrp="1"/>
+          </p:cNvSpPr>
+          <p:nvPr>
+            <p:ph type="dt" idx="10"/>
+          </p:nvPr>
+        </p:nvSpPr>
+        <p:spPr>
+          <a:xfrm>
+            <a:off x="609600" y="6309360"/>
+            <a:ext cx="3048000" cy="274320"/>
+          </a:xfrm>
+        </p:spPr>
+        <p:txBody>
+          <a:bodyPr/>
+          <a:lstStyle/>
+          <a:p>
+            <a:endParaRPr lang="en-US"/>
+          </a:p>
+        </p:txBody>
+      </p:sp>
+      <p:sp>
+        <p:nvSpPr>
+          <p:cNvPr id="5" name="Ftr Placeholder 4"/>
+          <p:cNvSpPr>
+            <a:spLocks noGrp="1"/>
+          </p:cNvSpPr>
+          <p:nvPr>
+            <p:ph type="ftr" idx="11"/>
+          </p:nvPr>
+        </p:nvSpPr>
+        <p:spPr>
+          <a:xfrm>
+            <a:off x="4023360" y="6309360"/>
+            <a:ext cx="4145280" cy="274320"/>
+          </a:xfrm>
+        </p:spPr>
+        <p:txBody>
+          <a:bodyPr/>
+          <a:lstStyle/>
+          <a:p>
+            <a:endParaRPr lang="en-US"/>
+          </a:p>
+        </p:txBody>
+      </p:sp>
+      <p:sp>
+        <p:nvSpPr>
+          <p:cNvPr id="6" name="SldNum Placeholder 5"/>
+          <p:cNvSpPr>
+            <a:spLocks noGrp="1"/>
+          </p:cNvSpPr>
+          <p:nvPr>
+            <p:ph type="sldNum" idx="12"/>
+          </p:nvPr>
+        </p:nvSpPr>
+        <p:spPr>
+          <a:xfrm>
+            <a:off x="9144000" y="6309360"/>
+            <a:ext cx="2438400" cy="274320"/>
+          </a:xfrm>
+        </p:spPr>
+        <p:txBody>
+          <a:bodyPr/>
+          <a:lstStyle/>
+          <a:p>
+            <a:endParaRPr lang="en-US"/>
+          </a:p>
+        </p:txBody>
+      </p:sp>
     </p:spTree>
   </p:cSld>
   <p:clrMapOvr>
@@ -7092,6 +7212,126 @@
           <a:chExt cx="0" cy="0"/>
         </a:xfrm>
       </p:grpSpPr>
+      <p:sp>
+        <p:nvSpPr>
+          <p:cNvPr id="2" name="Title Placeholder 1"/>
+          <p:cNvSpPr>
+            <a:spLocks noGrp="1"/>
+          </p:cNvSpPr>
+          <p:nvPr>
+            <p:ph type="title" idx="0"/>
+          </p:nvPr>
+        </p:nvSpPr>
+        <p:spPr>
+          <a:xfrm>
+            <a:off x="609600" y="274320"/>
+            <a:ext cx="10972800" cy="1028700"/>
+          </a:xfrm>
+        </p:spPr>
+        <p:txBody>
+          <a:bodyPr/>
+          <a:lstStyle/>
+          <a:p>
+            <a:endParaRPr lang="en-US"/>
+          </a:p>
+        </p:txBody>
+      </p:sp>
+      <p:sp>
+        <p:nvSpPr>
+          <p:cNvPr id="3" name="Obj Placeholder 2"/>
+          <p:cNvSpPr>
+            <a:spLocks noGrp="1"/>
+          </p:cNvSpPr>
+          <p:nvPr>
+            <p:ph type="obj" idx="1"/>
+          </p:nvPr>
+        </p:nvSpPr>
+        <p:spPr>
+          <a:xfrm>
+            <a:off x="609600" y="1577340"/>
+            <a:ext cx="10972800" cy="4389120"/>
+          </a:xfrm>
+        </p:spPr>
+        <p:txBody>
+          <a:bodyPr/>
+          <a:lstStyle/>
+          <a:p>
+            <a:endParaRPr lang="en-US"/>
+          </a:p>
+        </p:txBody>
+      </p:sp>
+      <p:sp>
+        <p:nvSpPr>
+          <p:cNvPr id="4" name="Dt Placeholder 3"/>
+          <p:cNvSpPr>
+            <a:spLocks noGrp="1"/>
+          </p:cNvSpPr>
+          <p:nvPr>
+            <p:ph type="dt" idx="10"/>
+          </p:nvPr>
+        </p:nvSpPr>
+        <p:spPr>
+          <a:xfrm>
+            <a:off x="609600" y="6309360"/>
+            <a:ext cx="3048000" cy="274320"/>
+          </a:xfrm>
+        </p:spPr>
+        <p:txBody>
+          <a:bodyPr/>
+          <a:lstStyle/>
+          <a:p>
+            <a:endParaRPr lang="en-US"/>
+          </a:p>
+        </p:txBody>
+      </p:sp>
+      <p:sp>
+        <p:nvSpPr>
+          <p:cNvPr id="5" name="Ftr Placeholder 4"/>
+          <p:cNvSpPr>
+            <a:spLocks noGrp="1"/>
+          </p:cNvSpPr>
+          <p:nvPr>
+            <p:ph type="ftr" idx="11"/>
+          </p:nvPr>
+        </p:nvSpPr>
+        <p:spPr>
+          <a:xfrm>
+            <a:off x="4023360" y="6309360"/>
+            <a:ext cx="4145280" cy="274320"/>
+          </a:xfrm>
+        </p:spPr>
+        <p:txBody>
+          <a:bodyPr/>
+          <a:lstStyle/>
+          <a:p>
+            <a:endParaRPr lang="en-US"/>
+          </a:p>
+        </p:txBody>
+      </p:sp>
+      <p:sp>
+        <p:nvSpPr>
+          <p:cNvPr id="6" name="SldNum Placeholder 5"/>
+          <p:cNvSpPr>
+            <a:spLocks noGrp="1"/>
+          </p:cNvSpPr>
+          <p:nvPr>
+            <p:ph type="sldNum" idx="12"/>
+          </p:nvPr>
+        </p:nvSpPr>
+        <p:spPr>
+          <a:xfrm>
+            <a:off x="9144000" y="6309360"/>
+            <a:ext cx="2438400" cy="274320"/>
+          </a:xfrm>
+        </p:spPr>
+        <p:txBody>
+          <a:bodyPr/>
+          <a:lstStyle/>
+          <a:p>
+            <a:endParaRPr lang="en-US"/>
+          </a:p>
+        </p:txBody>
+      </p:sp>
     </p:spTree>
   </p:cSld>
   <p:clrMapOvr>
@@ -7117,6 +7357,126 @@
           <a:chExt cx="0" cy="0"/>
         </a:xfrm>
       </p:grpSpPr>
+      <p:sp>
+        <p:nvSpPr>
+          <p:cNvPr id="2" name="Title Placeholder 1"/>
+          <p:cNvSpPr>
+            <a:spLocks noGrp="1"/>
+          </p:cNvSpPr>
+          <p:nvPr>
+            <p:ph type="title" idx="0"/>
+          </p:nvPr>
+        </p:nvSpPr>
+        <p:spPr>
+          <a:xfrm>
+            <a:off x="609600" y="274320"/>
+            <a:ext cx="10972800" cy="1028700"/>
+          </a:xfrm>
+        </p:spPr>
+        <p:txBody>
+          <a:bodyPr/>
+          <a:lstStyle/>
+          <a:p>
+            <a:endParaRPr lang="en-US"/>
+          </a:p>
+        </p:txBody>
+      </p:sp>
+      <p:sp>
+        <p:nvSpPr>
+          <p:cNvPr id="3" name="Obj Placeholder 2"/>
+          <p:cNvSpPr>
+            <a:spLocks noGrp="1"/>
+          </p:cNvSpPr>
+          <p:nvPr>
+            <p:ph type="obj" idx="1"/>
+          </p:nvPr>
+        </p:nvSpPr>
+        <p:spPr>
+          <a:xfrm>
+            <a:off x="609600" y="1577340"/>
+            <a:ext cx="10972800" cy="4389120"/>
+          </a:xfrm>
+        </p:spPr>
+        <p:txBody>
+          <a:bodyPr/>
+          <a:lstStyle/>
+          <a:p>
+            <a:endParaRPr lang="en-US"/>
+          </a:p>
+        </p:txBody>
+      </p:sp>
+      <p:sp>
+        <p:nvSpPr>
+          <p:cNvPr id="4" name="Dt Placeholder 3"/>
+          <p:cNvSpPr>
+            <a:spLocks noGrp="1"/>
+          </p:cNvSpPr>
+          <p:nvPr>
+            <p:ph type="dt" idx="10"/>
+          </p:nvPr>
+        </p:nvSpPr>
+        <p:spPr>
+          <a:xfrm>
+            <a:off x="609600" y="6309360"/>
+            <a:ext cx="3048000" cy="274320"/>
+          </a:xfrm>
+        </p:spPr>
+        <p:txBody>
+          <a:bodyPr/>
+          <a:lstStyle/>
+          <a:p>
+            <a:endParaRPr lang="en-US"/>
+          </a:p>
+        </p:txBody>
+      </p:sp>
+      <p:sp>
+        <p:nvSpPr>
+          <p:cNvPr id="5" name="Ftr Placeholder 4"/>
+          <p:cNvSpPr>
+            <a:spLocks noGrp="1"/>
+          </p:cNvSpPr>
+          <p:nvPr>
+            <p:ph type="ftr" idx="11"/>
+          </p:nvPr>
+        </p:nvSpPr>
+        <p:spPr>
+          <a:xfrm>
+            <a:off x="4023360" y="6309360"/>
+            <a:ext cx="4145280" cy="274320"/>
+          </a:xfrm>
+        </p:spPr>
+        <p:txBody>
+          <a:bodyPr/>
+          <a:lstStyle/>
+          <a:p>
+            <a:endParaRPr lang="en-US"/>
+          </a:p>
+        </p:txBody>
+      </p:sp>
+      <p:sp>
+        <p:nvSpPr>
+          <p:cNvPr id="6" name="SldNum Placeholder 5"/>
+          <p:cNvSpPr>
+            <a:spLocks noGrp="1"/>
+          </p:cNvSpPr>
+          <p:nvPr>
+            <p:ph type="sldNum" idx="12"/>
+          </p:nvPr>
+        </p:nvSpPr>
+        <p:spPr>
+          <a:xfrm>
+            <a:off x="9144000" y="6309360"/>
+            <a:ext cx="2438400" cy="274320"/>
+          </a:xfrm>
+        </p:spPr>
+        <p:txBody>
+          <a:bodyPr/>
+          <a:lstStyle/>
+          <a:p>
+            <a:endParaRPr lang="en-US"/>
+          </a:p>
+        </p:txBody>
+      </p:sp>
     </p:spTree>
   </p:cSld>
   <p:clrMapOvr>
@@ -7142,6 +7502,126 @@
           <a:chExt cx="0" cy="0"/>
         </a:xfrm>
       </p:grpSpPr>
+      <p:sp>
+        <p:nvSpPr>
+          <p:cNvPr id="2" name="Title Placeholder 1"/>
+          <p:cNvSpPr>
+            <a:spLocks noGrp="1"/>
+          </p:cNvSpPr>
+          <p:nvPr>
+            <p:ph type="title" idx="0"/>
+          </p:nvPr>
+        </p:nvSpPr>
+        <p:spPr>
+          <a:xfrm>
+            <a:off x="609600" y="274320"/>
+            <a:ext cx="10972800" cy="1028700"/>
+          </a:xfrm>
+        </p:spPr>
+        <p:txBody>
+          <a:bodyPr/>
+          <a:lstStyle/>
+          <a:p>
+            <a:endParaRPr lang="en-US"/>
+          </a:p>
+        </p:txBody>
+      </p:sp>
+      <p:sp>
+        <p:nvSpPr>
+          <p:cNvPr id="3" name="Obj Placeholder 2"/>
+          <p:cNvSpPr>
+            <a:spLocks noGrp="1"/>
+          </p:cNvSpPr>
+          <p:nvPr>
+            <p:ph type="obj" idx="1"/>
+          </p:nvPr>
+        </p:nvSpPr>
+        <p:spPr>
+          <a:xfrm>
+            <a:off x="609600" y="1577340"/>
+            <a:ext cx="10972800" cy="4389120"/>
+          </a:xfrm>
+        </p:spPr>
+        <p:txBody>
+          <a:bodyPr/>
+          <a:lstStyle/>
+          <a:p>
+            <a:endParaRPr lang="en-US"/>
+          </a:p>
+        </p:txBody>
+      </p:sp>
+      <p:sp>
+        <p:nvSpPr>
+          <p:cNvPr id="4" name="Dt Placeholder 3"/>
+          <p:cNvSpPr>
+            <a:spLocks noGrp="1"/>
+          </p:cNvSpPr>
+          <p:nvPr>
+            <p:ph type="dt" idx="10"/>
+          </p:nvPr>
+        </p:nvSpPr>
+        <p:spPr>
+          <a:xfrm>
+            <a:off x="609600" y="6309360"/>
+            <a:ext cx="3048000" cy="274320"/>
+          </a:xfrm>
+        </p:spPr>
+        <p:txBody>
+          <a:bodyPr/>
+          <a:lstStyle/>
+          <a:p>
+            <a:endParaRPr lang="en-US"/>
+          </a:p>
+        </p:txBody>
+      </p:sp>
+      <p:sp>
+        <p:nvSpPr>
+          <p:cNvPr id="5" name="Ftr Placeholder 4"/>
+          <p:cNvSpPr>
+            <a:spLocks noGrp="1"/>
+          </p:cNvSpPr>
+          <p:nvPr>
+            <p:ph type="ftr" idx="11"/>
+          </p:nvPr>
+        </p:nvSpPr>
+        <p:spPr>
+          <a:xfrm>
+            <a:off x="4023360" y="6309360"/>
+            <a:ext cx="4145280" cy="274320"/>
+          </a:xfrm>
+        </p:spPr>
+        <p:txBody>
+          <a:bodyPr/>
+          <a:lstStyle/>
+          <a:p>
+            <a:endParaRPr lang="en-US"/>
+          </a:p>
+        </p:txBody>
+      </p:sp>
+      <p:sp>
+        <p:nvSpPr>
+          <p:cNvPr id="6" name="SldNum Placeholder 5"/>
+          <p:cNvSpPr>
+            <a:spLocks noGrp="1"/>
+          </p:cNvSpPr>
+          <p:nvPr>
+            <p:ph type="sldNum" idx="12"/>
+          </p:nvPr>
+        </p:nvSpPr>
+        <p:spPr>
+          <a:xfrm>
+            <a:off x="9144000" y="6309360"/>
+            <a:ext cx="2438400" cy="274320"/>
+          </a:xfrm>
+        </p:spPr>
+        <p:txBody>
+          <a:bodyPr/>
+          <a:lstStyle/>
+          <a:p>
+            <a:endParaRPr lang="en-US"/>
+          </a:p>
+        </p:txBody>
+      </p:sp>
     </p:spTree>
   </p:cSld>
   <p:clrMapOvr>
@@ -7167,6 +7647,126 @@
           <a:chExt cx="0" cy="0"/>
         </a:xfrm>
       </p:grpSpPr>
+      <p:sp>
+        <p:nvSpPr>
+          <p:cNvPr id="2" name="Title Placeholder 1"/>
+          <p:cNvSpPr>
+            <a:spLocks noGrp="1"/>
+          </p:cNvSpPr>
+          <p:nvPr>
+            <p:ph type="title" idx="0"/>
+          </p:nvPr>
+        </p:nvSpPr>
+        <p:spPr>
+          <a:xfrm>
+            <a:off x="609600" y="2537460"/>
+            <a:ext cx="10972800" cy="1371600"/>
+          </a:xfrm>
+        </p:spPr>
+        <p:txBody>
+          <a:bodyPr/>
+          <a:lstStyle/>
+          <a:p>
+            <a:endParaRPr lang="en-US"/>
+          </a:p>
+        </p:txBody>
+      </p:sp>
+      <p:sp>
+        <p:nvSpPr>
+          <p:cNvPr id="3" name="Body Placeholder 2"/>
+          <p:cNvSpPr>
+            <a:spLocks noGrp="1"/>
+          </p:cNvSpPr>
+          <p:nvPr>
+            <p:ph type="body" idx="1"/>
+          </p:nvPr>
+        </p:nvSpPr>
+        <p:spPr>
+          <a:xfrm>
+            <a:off x="609600" y="4114800"/>
+            <a:ext cx="10972800" cy="1577340"/>
+          </a:xfrm>
+        </p:spPr>
+        <p:txBody>
+          <a:bodyPr/>
+          <a:lstStyle/>
+          <a:p>
+            <a:endParaRPr lang="en-US"/>
+          </a:p>
+        </p:txBody>
+      </p:sp>
+      <p:sp>
+        <p:nvSpPr>
+          <p:cNvPr id="4" name="Dt Placeholder 3"/>
+          <p:cNvSpPr>
+            <a:spLocks noGrp="1"/>
+          </p:cNvSpPr>
+          <p:nvPr>
+            <p:ph type="dt" idx="10"/>
+          </p:nvPr>
+        </p:nvSpPr>
+        <p:spPr>
+          <a:xfrm>
+            <a:off x="609600" y="6309360"/>
+            <a:ext cx="3048000" cy="274320"/>
+          </a:xfrm>
+        </p:spPr>
+        <p:txBody>
+          <a:bodyPr/>
+          <a:lstStyle/>
+          <a:p>
+            <a:endParaRPr lang="en-US"/>
+          </a:p>
+        </p:txBody>
+      </p:sp>
+      <p:sp>
+        <p:nvSpPr>
+          <p:cNvPr id="5" name="Ftr Placeholder 4"/>
+          <p:cNvSpPr>
+            <a:spLocks noGrp="1"/>
+          </p:cNvSpPr>
+          <p:nvPr>
+            <p:ph type="ftr" idx="11"/>
+          </p:nvPr>
+        </p:nvSpPr>
+        <p:spPr>
+          <a:xfrm>
+            <a:off x="4023360" y="6309360"/>
+            <a:ext cx="4145280" cy="274320"/>
+          </a:xfrm>
+        </p:spPr>
+        <p:txBody>
+          <a:bodyPr/>
+          <a:lstStyle/>
+          <a:p>
+            <a:endParaRPr lang="en-US"/>
+          </a:p>
+        </p:txBody>
+      </p:sp>
+      <p:sp>
+        <p:nvSpPr>
+          <p:cNvPr id="6" name="SldNum Placeholder 5"/>
+          <p:cNvSpPr>
+            <a:spLocks noGrp="1"/>
+          </p:cNvSpPr>
+          <p:nvPr>
+            <p:ph type="sldNum" idx="12"/>
+          </p:nvPr>
+        </p:nvSpPr>
+        <p:spPr>
+          <a:xfrm>
+            <a:off x="9144000" y="6309360"/>
+            <a:ext cx="2438400" cy="274320"/>
+          </a:xfrm>
+        </p:spPr>
+        <p:txBody>
+          <a:bodyPr/>
+          <a:lstStyle/>
+          <a:p>
+            <a:endParaRPr lang="en-US"/>
+          </a:p>
+        </p:txBody>
+      </p:sp>
     </p:spTree>
   </p:cSld>
   <p:clrMapOvr>
@@ -7192,6 +7792,150 @@
           <a:chExt cx="0" cy="0"/>
         </a:xfrm>
       </p:grpSpPr>
+      <p:sp>
+        <p:nvSpPr>
+          <p:cNvPr id="2" name="Title Placeholder 1"/>
+          <p:cNvSpPr>
+            <a:spLocks noGrp="1"/>
+          </p:cNvSpPr>
+          <p:nvPr>
+            <p:ph type="title" idx="0"/>
+          </p:nvPr>
+        </p:nvSpPr>
+        <p:spPr>
+          <a:xfrm>
+            <a:off x="609600" y="274320"/>
+            <a:ext cx="10972800" cy="1028700"/>
+          </a:xfrm>
+        </p:spPr>
+        <p:txBody>
+          <a:bodyPr/>
+          <a:lstStyle/>
+          <a:p>
+            <a:endParaRPr lang="en-US"/>
+          </a:p>
+        </p:txBody>
+      </p:sp>
+      <p:sp>
+        <p:nvSpPr>
+          <p:cNvPr id="3" name="Obj Placeholder 2"/>
+          <p:cNvSpPr>
+            <a:spLocks noGrp="1"/>
+          </p:cNvSpPr>
+          <p:nvPr>
+            <p:ph type="obj" idx="1"/>
+          </p:nvPr>
+        </p:nvSpPr>
+        <p:spPr>
+          <a:xfrm>
+            <a:off x="609600" y="1851660"/>
+            <a:ext cx="5242560" cy="4114800"/>
+          </a:xfrm>
+        </p:spPr>
+        <p:txBody>
+          <a:bodyPr/>
+          <a:lstStyle/>
+          <a:p>
+            <a:endParaRPr lang="en-US"/>
+          </a:p>
+        </p:txBody>
+      </p:sp>
+      <p:sp>
+        <p:nvSpPr>
+          <p:cNvPr id="4" name="Obj Placeholder 3"/>
+          <p:cNvSpPr>
+            <a:spLocks noGrp="1"/>
+          </p:cNvSpPr>
+          <p:nvPr>
+            <p:ph type="obj" idx="2"/>
+          </p:nvPr>
+        </p:nvSpPr>
+        <p:spPr>
+          <a:xfrm>
+            <a:off x="6339840" y="1851660"/>
+            <a:ext cx="5242560" cy="4114800"/>
+          </a:xfrm>
+        </p:spPr>
+        <p:txBody>
+          <a:bodyPr/>
+          <a:lstStyle/>
+          <a:p>
+            <a:endParaRPr lang="en-US"/>
+          </a:p>
+        </p:txBody>
+      </p:sp>
+      <p:sp>
+        <p:nvSpPr>
+          <p:cNvPr id="5" name="Dt Placeholder 4"/>
+          <p:cNvSpPr>
+            <a:spLocks noGrp="1"/>
+          </p:cNvSpPr>
+          <p:nvPr>
+            <p:ph type="dt" idx="10"/>
+          </p:nvPr>
+        </p:nvSpPr>
+        <p:spPr>
+          <a:xfrm>
+            <a:off x="609600" y="6309360"/>
+            <a:ext cx="3048000" cy="274320"/>
+          </a:xfrm>
+        </p:spPr>
+        <p:txBody>
+          <a:bodyPr/>
+          <a:lstStyle/>
+          <a:p>
+            <a:endParaRPr lang="en-US"/>
+          </a:p>
+        </p:txBody>
+      </p:sp>
+      <p:sp>
+        <p:nvSpPr>
+          <p:cNvPr id="6" name="Ftr Placeholder 5"/>
+          <p:cNvSpPr>
+            <a:spLocks noGrp="1"/>
+          </p:cNvSpPr>
+          <p:nvPr>
+            <p:ph type="ftr" idx="11"/>
+          </p:nvPr>
+        </p:nvSpPr>
+        <p:spPr>
+          <a:xfrm>
+            <a:off x="4023360" y="6309360"/>
+            <a:ext cx="4145280" cy="274320"/>
+          </a:xfrm>
+        </p:spPr>
+        <p:txBody>
+          <a:bodyPr/>
+          <a:lstStyle/>
+          <a:p>
+            <a:endParaRPr lang="en-US"/>
+          </a:p>
+        </p:txBody>
+      </p:sp>
+      <p:sp>
+        <p:nvSpPr>
+          <p:cNvPr id="7" name="SldNum Placeholder 6"/>
+          <p:cNvSpPr>
+            <a:spLocks noGrp="1"/>
+          </p:cNvSpPr>
+          <p:nvPr>
+            <p:ph type="sldNum" idx="12"/>
+          </p:nvPr>
+        </p:nvSpPr>
+        <p:spPr>
+          <a:xfrm>
+            <a:off x="9144000" y="6309360"/>
+            <a:ext cx="2438400" cy="274320"/>
+          </a:xfrm>
+        </p:spPr>
+        <p:txBody>
+          <a:bodyPr/>
+          <a:lstStyle/>
+          <a:p>
+            <a:endParaRPr lang="en-US"/>
+          </a:p>
+        </p:txBody>
+      </p:sp>
     </p:spTree>
   </p:cSld>
   <p:clrMapOvr>
@@ -7217,6 +7961,198 @@
           <a:chExt cx="0" cy="0"/>
         </a:xfrm>
       </p:grpSpPr>
+      <p:sp>
+        <p:nvSpPr>
+          <p:cNvPr id="2" name="Title Placeholder 1"/>
+          <p:cNvSpPr>
+            <a:spLocks noGrp="1"/>
+          </p:cNvSpPr>
+          <p:nvPr>
+            <p:ph type="title" idx="0"/>
+          </p:nvPr>
+        </p:nvSpPr>
+        <p:spPr>
+          <a:xfrm>
+            <a:off x="609600" y="274320"/>
+            <a:ext cx="10972800" cy="1028700"/>
+          </a:xfrm>
+        </p:spPr>
+        <p:txBody>
+          <a:bodyPr/>
+          <a:lstStyle/>
+          <a:p>
+            <a:endParaRPr lang="en-US"/>
+          </a:p>
+        </p:txBody>
+      </p:sp>
+      <p:sp>
+        <p:nvSpPr>
+          <p:cNvPr id="3" name="Obj Placeholder 2"/>
+          <p:cNvSpPr>
+            <a:spLocks noGrp="1"/>
+          </p:cNvSpPr>
+          <p:nvPr>
+            <p:ph type="obj" idx="1"/>
+          </p:nvPr>
+        </p:nvSpPr>
+        <p:spPr>
+          <a:xfrm>
+            <a:off x="609600" y="1851660"/>
+            <a:ext cx="5242560" cy="4114800"/>
+          </a:xfrm>
+        </p:spPr>
+        <p:txBody>
+          <a:bodyPr/>
+          <a:lstStyle/>
+          <a:p>
+            <a:endParaRPr lang="en-US"/>
+          </a:p>
+        </p:txBody>
+      </p:sp>
+      <p:sp>
+        <p:nvSpPr>
+          <p:cNvPr id="4" name="Obj Placeholder 3"/>
+          <p:cNvSpPr>
+            <a:spLocks noGrp="1"/>
+          </p:cNvSpPr>
+          <p:nvPr>
+            <p:ph type="obj" idx="2"/>
+          </p:nvPr>
+        </p:nvSpPr>
+        <p:spPr>
+          <a:xfrm>
+            <a:off x="6339840" y="1851660"/>
+            <a:ext cx="5242560" cy="4114800"/>
+          </a:xfrm>
+        </p:spPr>
+        <p:txBody>
+          <a:bodyPr/>
+          <a:lstStyle/>
+          <a:p>
+            <a:endParaRPr lang="en-US"/>
+          </a:p>
+        </p:txBody>
+      </p:sp>
+      <p:sp>
+        <p:nvSpPr>
+          <p:cNvPr id="5" name="Body Placeholder 4"/>
+          <p:cNvSpPr>
+            <a:spLocks noGrp="1"/>
+          </p:cNvSpPr>
+          <p:nvPr>
+            <p:ph type="body" idx="3"/>
+          </p:nvPr>
+        </p:nvSpPr>
+        <p:spPr>
+          <a:xfrm>
+            <a:off x="609600" y="1371600"/>
+            <a:ext cx="5242560" cy="480060"/>
+          </a:xfrm>
+        </p:spPr>
+        <p:txBody>
+          <a:bodyPr/>
+          <a:lstStyle/>
+          <a:p>
+            <a:endParaRPr lang="en-US"/>
+          </a:p>
+        </p:txBody>
+      </p:sp>
+      <p:sp>
+        <p:nvSpPr>
+          <p:cNvPr id="6" name="Body Placeholder 5"/>
+          <p:cNvSpPr>
+            <a:spLocks noGrp="1"/>
+          </p:cNvSpPr>
+          <p:nvPr>
+            <p:ph type="body" idx="4"/>
+          </p:nvPr>
+        </p:nvSpPr>
+        <p:spPr>
+          <a:xfrm>
+            <a:off x="6339840" y="1371600"/>
+            <a:ext cx="5242560" cy="480060"/>
+          </a:xfrm>
+        </p:spPr>
+        <p:txBody>
+          <a:bodyPr/>
+          <a:lstStyle/>
+          <a:p>
+            <a:endParaRPr lang="en-US"/>
+          </a:p>
+        </p:txBody>
+      </p:sp>
+      <p:sp>
+        <p:nvSpPr>
+          <p:cNvPr id="7" name="Dt Placeholder 6"/>
+          <p:cNvSpPr>
+            <a:spLocks noGrp="1"/>
+          </p:cNvSpPr>
+          <p:nvPr>
+            <p:ph type="dt" idx="10"/>
+          </p:nvPr>
+        </p:nvSpPr>
+        <p:spPr>
+          <a:xfrm>
+            <a:off x="609600" y="6309360"/>
+            <a:ext cx="3048000" cy="274320"/>
+          </a:xfrm>
+        </p:spPr>
+        <p:txBody>
+          <a:bodyPr/>
+          <a:lstStyle/>
+          <a:p>
+            <a:endParaRPr lang="en-US"/>
+          </a:p>
+        </p:txBody>
+      </p:sp>
+      <p:sp>
+        <p:nvSpPr>
+          <p:cNvPr id="8" name="Ftr Placeholder 7"/>
+          <p:cNvSpPr>
+            <a:spLocks noGrp="1"/>
+          </p:cNvSpPr>
+          <p:nvPr>
+            <p:ph type="ftr" idx="11"/>
+          </p:nvPr>
+        </p:nvSpPr>
+        <p:spPr>
+          <a:xfrm>
+            <a:off x="4023360" y="6309360"/>
+            <a:ext cx="4145280" cy="274320"/>
+          </a:xfrm>
+        </p:spPr>
+        <p:txBody>
+          <a:bodyPr/>
+          <a:lstStyle/>
+          <a:p>
+            <a:endParaRPr lang="en-US"/>
+          </a:p>
+        </p:txBody>
+      </p:sp>
+      <p:sp>
+        <p:nvSpPr>
+          <p:cNvPr id="9" name="SldNum Placeholder 8"/>
+          <p:cNvSpPr>
+            <a:spLocks noGrp="1"/>
+          </p:cNvSpPr>
+          <p:nvPr>
+            <p:ph type="sldNum" idx="12"/>
+          </p:nvPr>
+        </p:nvSpPr>
+        <p:spPr>
+          <a:xfrm>
+            <a:off x="9144000" y="6309360"/>
+            <a:ext cx="2438400" cy="274320"/>
+          </a:xfrm>
+        </p:spPr>
+        <p:txBody>
+          <a:bodyPr/>
+          <a:lstStyle/>
+          <a:p>
+            <a:endParaRPr lang="en-US"/>
+          </a:p>
+        </p:txBody>
+      </p:sp>
     </p:spTree>
   </p:cSld>
   <p:clrMapOvr>
@@ -7242,6 +8178,102 @@
           <a:chExt cx="0" cy="0"/>
         </a:xfrm>
       </p:grpSpPr>
+      <p:sp>
+        <p:nvSpPr>
+          <p:cNvPr id="2" name="Title Placeholder 1"/>
+          <p:cNvSpPr>
+            <a:spLocks noGrp="1"/>
+          </p:cNvSpPr>
+          <p:nvPr>
+            <p:ph type="title" idx="0"/>
+          </p:nvPr>
+        </p:nvSpPr>
+        <p:spPr>
+          <a:xfrm>
+            <a:off x="609600" y="274320"/>
+            <a:ext cx="10972800" cy="1028700"/>
+          </a:xfrm>
+        </p:spPr>
+        <p:txBody>
+          <a:bodyPr/>
+          <a:lstStyle/>
+          <a:p>
+            <a:endParaRPr lang="en-US"/>
+          </a:p>
+        </p:txBody>
+      </p:sp>
+      <p:sp>
+        <p:nvSpPr>
+          <p:cNvPr id="3" name="Dt Placeholder 2"/>
+          <p:cNvSpPr>
+            <a:spLocks noGrp="1"/>
+          </p:cNvSpPr>
+          <p:nvPr>
+            <p:ph type="dt" idx="10"/>
+          </p:nvPr>
+        </p:nvSpPr>
+        <p:spPr>
+          <a:xfrm>
+            <a:off x="609600" y="6309360"/>
+            <a:ext cx="3048000" cy="274320"/>
+          </a:xfrm>
+        </p:spPr>
+        <p:txBody>
+          <a:bodyPr/>
+          <a:lstStyle/>
+          <a:p>
+            <a:endParaRPr lang="en-US"/>
+          </a:p>
+        </p:txBody>
+      </p:sp>
+      <p:sp>
+        <p:nvSpPr>
+          <p:cNvPr id="4" name="Ftr Placeholder 3"/>
+          <p:cNvSpPr>
+            <a:spLocks noGrp="1"/>
+          </p:cNvSpPr>
+          <p:nvPr>
+            <p:ph type="ftr" idx="11"/>
+          </p:nvPr>
+        </p:nvSpPr>
+        <p:spPr>
+          <a:xfrm>
+            <a:off x="4023360" y="6309360"/>
+            <a:ext cx="4145280" cy="274320"/>
+          </a:xfrm>
+        </p:spPr>
+        <p:txBody>
+          <a:bodyPr/>
+          <a:lstStyle/>
+          <a:p>
+            <a:endParaRPr lang="en-US"/>
+          </a:p>
+        </p:txBody>
+      </p:sp>
+      <p:sp>
+        <p:nvSpPr>
+          <p:cNvPr id="5" name="SldNum Placeholder 4"/>
+          <p:cNvSpPr>
+            <a:spLocks noGrp="1"/>
+          </p:cNvSpPr>
+          <p:nvPr>
+            <p:ph type="sldNum" idx="12"/>
+          </p:nvPr>
+        </p:nvSpPr>
+        <p:spPr>
+          <a:xfrm>
+            <a:off x="9144000" y="6309360"/>
+            <a:ext cx="2438400" cy="274320"/>
+          </a:xfrm>
+        </p:spPr>
+        <p:txBody>
+          <a:bodyPr/>
+          <a:lstStyle/>
+          <a:p>
+            <a:endParaRPr lang="en-US"/>
+          </a:p>
+        </p:txBody>
+      </p:sp>
     </p:spTree>
   </p:cSld>
   <p:clrMapOvr>
@@ -7292,6 +8324,150 @@
           <a:chExt cx="0" cy="0"/>
         </a:xfrm>
       </p:grpSpPr>
+      <p:sp>
+        <p:nvSpPr>
+          <p:cNvPr id="2" name="Title Placeholder 1"/>
+          <p:cNvSpPr>
+            <a:spLocks noGrp="1"/>
+          </p:cNvSpPr>
+          <p:nvPr>
+            <p:ph type="title" idx="0"/>
+          </p:nvPr>
+        </p:nvSpPr>
+        <p:spPr>
+          <a:xfrm>
+            <a:off x="609600" y="274320"/>
+            <a:ext cx="10972800" cy="1028700"/>
+          </a:xfrm>
+        </p:spPr>
+        <p:txBody>
+          <a:bodyPr/>
+          <a:lstStyle/>
+          <a:p>
+            <a:endParaRPr lang="en-US"/>
+          </a:p>
+        </p:txBody>
+      </p:sp>
+      <p:sp>
+        <p:nvSpPr>
+          <p:cNvPr id="3" name="Obj Placeholder 2"/>
+          <p:cNvSpPr>
+            <a:spLocks noGrp="1"/>
+          </p:cNvSpPr>
+          <p:nvPr>
+            <p:ph type="obj" idx="1"/>
+          </p:nvPr>
+        </p:nvSpPr>
+        <p:spPr>
+          <a:xfrm>
+            <a:off x="4389120" y="1577340"/>
+            <a:ext cx="7193280" cy="4389120"/>
+          </a:xfrm>
+        </p:spPr>
+        <p:txBody>
+          <a:bodyPr/>
+          <a:lstStyle/>
+          <a:p>
+            <a:endParaRPr lang="en-US"/>
+          </a:p>
+        </p:txBody>
+      </p:sp>
+      <p:sp>
+        <p:nvSpPr>
+          <p:cNvPr id="4" name="Body Placeholder 3"/>
+          <p:cNvSpPr>
+            <a:spLocks noGrp="1"/>
+          </p:cNvSpPr>
+          <p:nvPr>
+            <p:ph type="body" idx="2"/>
+          </p:nvPr>
+        </p:nvSpPr>
+        <p:spPr>
+          <a:xfrm>
+            <a:off x="609600" y="1577340"/>
+            <a:ext cx="3291840" cy="4389120"/>
+          </a:xfrm>
+        </p:spPr>
+        <p:txBody>
+          <a:bodyPr/>
+          <a:lstStyle/>
+          <a:p>
+            <a:endParaRPr lang="en-US"/>
+          </a:p>
+        </p:txBody>
+      </p:sp>
+      <p:sp>
+        <p:nvSpPr>
+          <p:cNvPr id="5" name="Dt Placeholder 4"/>
+          <p:cNvSpPr>
+            <a:spLocks noGrp="1"/>
+          </p:cNvSpPr>
+          <p:nvPr>
+            <p:ph type="dt" idx="10"/>
+          </p:nvPr>
+        </p:nvSpPr>
+        <p:spPr>
+          <a:xfrm>
+            <a:off x="609600" y="6309360"/>
+            <a:ext cx="3048000" cy="274320"/>
+          </a:xfrm>
+        </p:spPr>
+        <p:txBody>
+          <a:bodyPr/>
+          <a:lstStyle/>
+          <a:p>
+            <a:endParaRPr lang="en-US"/>
+          </a:p>
+        </p:txBody>
+      </p:sp>
+      <p:sp>
+        <p:nvSpPr>
+          <p:cNvPr id="6" name="Ftr Placeholder 5"/>
+          <p:cNvSpPr>
+            <a:spLocks noGrp="1"/>
+          </p:cNvSpPr>
+          <p:nvPr>
+            <p:ph type="ftr" idx="11"/>
+          </p:nvPr>
+        </p:nvSpPr>
+        <p:spPr>
+          <a:xfrm>
+            <a:off x="4023360" y="6309360"/>
+            <a:ext cx="4145280" cy="274320"/>
+          </a:xfrm>
+        </p:spPr>
+        <p:txBody>
+          <a:bodyPr/>
+          <a:lstStyle/>
+          <a:p>
+            <a:endParaRPr lang="en-US"/>
+          </a:p>
+        </p:txBody>
+      </p:sp>
+      <p:sp>
+        <p:nvSpPr>
+          <p:cNvPr id="7" name="SldNum Placeholder 6"/>
+          <p:cNvSpPr>
+            <a:spLocks noGrp="1"/>
+          </p:cNvSpPr>
+          <p:nvPr>
+            <p:ph type="sldNum" idx="12"/>
+          </p:nvPr>
+        </p:nvSpPr>
+        <p:spPr>
+          <a:xfrm>
+            <a:off x="9144000" y="6309360"/>
+            <a:ext cx="2438400" cy="274320"/>
+          </a:xfrm>
+        </p:spPr>
+        <p:txBody>
+          <a:bodyPr/>
+          <a:lstStyle/>
+          <a:p>
+            <a:endParaRPr lang="en-US"/>
+          </a:p>
+        </p:txBody>
+      </p:sp>
     </p:spTree>
   </p:cSld>
   <p:clrMapOvr>
@@ -7317,6 +8493,150 @@
           <a:chExt cx="0" cy="0"/>
         </a:xfrm>
       </p:grpSpPr>
+      <p:sp>
+        <p:nvSpPr>
+          <p:cNvPr id="2" name="Title Placeholder 1"/>
+          <p:cNvSpPr>
+            <a:spLocks noGrp="1"/>
+          </p:cNvSpPr>
+          <p:nvPr>
+            <p:ph type="title" idx="0"/>
+          </p:nvPr>
+        </p:nvSpPr>
+        <p:spPr>
+          <a:xfrm>
+            <a:off x="609600" y="274320"/>
+            <a:ext cx="10972800" cy="1028700"/>
+          </a:xfrm>
+        </p:spPr>
+        <p:txBody>
+          <a:bodyPr/>
+          <a:lstStyle/>
+          <a:p>
+            <a:endParaRPr lang="en-US"/>
+          </a:p>
+        </p:txBody>
+      </p:sp>
+      <p:sp>
+        <p:nvSpPr>
+          <p:cNvPr id="3" name="Pic Placeholder 2"/>
+          <p:cNvSpPr>
+            <a:spLocks noGrp="1"/>
+          </p:cNvSpPr>
+          <p:nvPr>
+            <p:ph type="pic" idx="1"/>
+          </p:nvPr>
+        </p:nvSpPr>
+        <p:spPr>
+          <a:xfrm>
+            <a:off x="4389120" y="1577340"/>
+            <a:ext cx="7193280" cy="4389120"/>
+          </a:xfrm>
+        </p:spPr>
+        <p:txBody>
+          <a:bodyPr/>
+          <a:lstStyle/>
+          <a:p>
+            <a:endParaRPr lang="en-US"/>
+          </a:p>
+        </p:txBody>
+      </p:sp>
+      <p:sp>
+        <p:nvSpPr>
+          <p:cNvPr id="4" name="Body Placeholder 3"/>
+          <p:cNvSpPr>
+            <a:spLocks noGrp="1"/>
+          </p:cNvSpPr>
+          <p:nvPr>
+            <p:ph type="body" idx="2"/>
+          </p:nvPr>
+        </p:nvSpPr>
+        <p:spPr>
+          <a:xfrm>
+            <a:off x="609600" y="1577340"/>
+            <a:ext cx="3291840" cy="4389120"/>
+          </a:xfrm>
+        </p:spPr>
+        <p:txBody>
+          <a:bodyPr/>
+          <a:lstStyle/>
+          <a:p>
+            <a:endParaRPr lang="en-US"/>
+          </a:p>
+        </p:txBody>
+      </p:sp>
+      <p:sp>
+        <p:nvSpPr>
+          <p:cNvPr id="5" name="Dt Placeholder 4"/>
+          <p:cNvSpPr>
+            <a:spLocks noGrp="1"/>
+          </p:cNvSpPr>
+          <p:nvPr>
+            <p:ph type="dt" idx="10"/>
+          </p:nvPr>
+        </p:nvSpPr>
+        <p:spPr>
+          <a:xfrm>
+            <a:off x="609600" y="6309360"/>
+            <a:ext cx="3048000" cy="274320"/>
+          </a:xfrm>
+        </p:spPr>
+        <p:txBody>
+          <a:bodyPr/>
+          <a:lstStyle/>
+          <a:p>
+            <a:endParaRPr lang="en-US"/>
+          </a:p>
+        </p:txBody>
+      </p:sp>
+      <p:sp>
+        <p:nvSpPr>
+          <p:cNvPr id="6" name="Ftr Placeholder 5"/>
+          <p:cNvSpPr>
+            <a:spLocks noGrp="1"/>
+          </p:cNvSpPr>
+          <p:nvPr>
+            <p:ph type="ftr" idx="11"/>
+          </p:nvPr>
+        </p:nvSpPr>
+        <p:spPr>
+          <a:xfrm>
+            <a:off x="4023360" y="6309360"/>
+            <a:ext cx="4145280" cy="274320"/>
+          </a:xfrm>
+        </p:spPr>
+        <p:txBody>
+          <a:bodyPr/>
+          <a:lstStyle/>
+          <a:p>
+            <a:endParaRPr lang="en-US"/>
+          </a:p>
+        </p:txBody>
+      </p:sp>
+      <p:sp>
+        <p:nvSpPr>
+          <p:cNvPr id="7" name="SldNum Placeholder 6"/>
+          <p:cNvSpPr>
+            <a:spLocks noGrp="1"/>
+          </p:cNvSpPr>
+          <p:nvPr>
+            <p:ph type="sldNum" idx="12"/>
+          </p:nvPr>
+        </p:nvSpPr>
+        <p:spPr>
+          <a:xfrm>
+            <a:off x="9144000" y="6309360"/>
+            <a:ext cx="2438400" cy="274320"/>
+          </a:xfrm>
+        </p:spPr>
+        <p:txBody>
+          <a:bodyPr/>
+          <a:lstStyle/>
+          <a:p>
+            <a:endParaRPr lang="en-US"/>
+          </a:p>
+        </p:txBody>
+      </p:sp>
     </p:spTree>
   </p:cSld>
   <p:clrMapOvr>
